--- a/presentation/EVENT-AI-Investor-RU.pptx
+++ b/presentation/EVENT-AI-Investor-RU.pptx
@@ -3093,173 +3093,9 @@
         <p:nvPr/>
       </p:nvGrpSpPr>
       <p:grpSpPr/>
-      <p:sp>
-        <p:nvSpPr>
-          <p:cNvPr id="2" name="Rectangle 1"/>
-          <p:cNvSpPr/>
-          <p:nvPr/>
-        </p:nvSpPr>
-        <p:spPr>
-          <a:xfrm>
-            <a:off x="0" y="0"/>
-            <a:ext cx="12191695" cy="6858000"/>
-          </a:xfrm>
-          <a:prstGeom prst="rect">
-            <a:avLst/>
-          </a:prstGeom>
-          <a:solidFill>
-            <a:srgbClr val="04060B"/>
-          </a:solidFill>
-          <a:ln>
-            <a:noFill/>
-          </a:ln>
-        </p:spPr>
-        <p:style>
-          <a:lnRef idx="1">
-            <a:schemeClr val="accent1"/>
-          </a:lnRef>
-          <a:fillRef idx="3">
-            <a:schemeClr val="accent1"/>
-          </a:fillRef>
-          <a:effectRef idx="2">
-            <a:schemeClr val="accent1"/>
-          </a:effectRef>
-          <a:fontRef idx="minor">
-            <a:schemeClr val="lt1"/>
-          </a:fontRef>
-        </p:style>
-        <p:txBody>
-          <a:bodyPr rtlCol="0" anchor="ctr"/>
-          <a:lstStyle/>
-          <a:p>
-            <a:pPr algn="ctr"/>
-          </a:p>
-        </p:txBody>
-      </p:sp>
-      <p:sp>
-        <p:nvSpPr>
-          <p:cNvPr id="3" name="Rectangle 2"/>
-          <p:cNvSpPr/>
-          <p:nvPr/>
-        </p:nvSpPr>
-        <p:spPr>
-          <a:xfrm>
-            <a:off x="7315200" y="0"/>
-            <a:ext cx="4876495" cy="6858000"/>
-          </a:xfrm>
-          <a:prstGeom prst="rect">
-            <a:avLst/>
-          </a:prstGeom>
-          <a:solidFill>
-            <a:srgbClr val="0A1124"/>
-          </a:solidFill>
-          <a:ln>
-            <a:noFill/>
-          </a:ln>
-        </p:spPr>
-        <p:style>
-          <a:lnRef idx="1">
-            <a:schemeClr val="accent1"/>
-          </a:lnRef>
-          <a:fillRef idx="3">
-            <a:schemeClr val="accent1"/>
-          </a:fillRef>
-          <a:effectRef idx="2">
-            <a:schemeClr val="accent1"/>
-          </a:effectRef>
-          <a:fontRef idx="minor">
-            <a:schemeClr val="lt1"/>
-          </a:fontRef>
-        </p:style>
-        <p:txBody>
-          <a:bodyPr rtlCol="0" anchor="ctr"/>
-          <a:lstStyle/>
-          <a:p>
-            <a:pPr algn="ctr"/>
-          </a:p>
-        </p:txBody>
-      </p:sp>
-      <p:sp>
-        <p:nvSpPr>
-          <p:cNvPr id="4" name="Rectangle 3"/>
-          <p:cNvSpPr/>
-          <p:nvPr/>
-        </p:nvSpPr>
-        <p:spPr>
-          <a:xfrm>
-            <a:off x="0" y="0"/>
-            <a:ext cx="54864" cy="6858000"/>
-          </a:xfrm>
-          <a:prstGeom prst="rect">
-            <a:avLst/>
-          </a:prstGeom>
-          <a:solidFill>
-            <a:srgbClr val="2C7BFF"/>
-          </a:solidFill>
-          <a:ln>
-            <a:noFill/>
-          </a:ln>
-        </p:spPr>
-        <p:style>
-          <a:lnRef idx="1">
-            <a:schemeClr val="accent1"/>
-          </a:lnRef>
-          <a:fillRef idx="3">
-            <a:schemeClr val="accent1"/>
-          </a:fillRef>
-          <a:effectRef idx="2">
-            <a:schemeClr val="accent1"/>
-          </a:effectRef>
-          <a:fontRef idx="minor">
-            <a:schemeClr val="lt1"/>
-          </a:fontRef>
-        </p:style>
-        <p:txBody>
-          <a:bodyPr rtlCol="0" anchor="ctr"/>
-          <a:lstStyle/>
-          <a:p>
-            <a:pPr algn="ctr"/>
-          </a:p>
-        </p:txBody>
-      </p:sp>
-      <p:sp>
-        <p:nvSpPr>
-          <p:cNvPr id="5" name="TextBox 4"/>
-          <p:cNvSpPr txBox="1"/>
-          <p:nvPr/>
-        </p:nvSpPr>
-        <p:spPr>
-          <a:xfrm>
-            <a:off x="502920" y="411480"/>
-            <a:ext cx="6400800" cy="320040"/>
-          </a:xfrm>
-          <a:prstGeom prst="rect">
-            <a:avLst/>
-          </a:prstGeom>
-          <a:noFill/>
-        </p:spPr>
-        <p:txBody>
-          <a:bodyPr wrap="square">
-            <a:spAutoFit/>
-          </a:bodyPr>
-          <a:lstStyle/>
-          <a:p>
-            <a:pPr algn="l"/>
-            <a:r>
-              <a:rPr sz="1100" b="1" i="0">
-                <a:solidFill>
-                  <a:srgbClr val="2C7BFF"/>
-                </a:solidFill>
-                <a:latin typeface="Arial"/>
-              </a:rPr>
-              <a:t>ИНВЕСТИЦИОННАЯ ПРЕЗЕНТАЦИЯ</a:t>
-            </a:r>
-          </a:p>
-        </p:txBody>
-      </p:sp>
       <p:pic>
         <p:nvPicPr>
-          <p:cNvPr id="6" name="Picture 5" descr="logo-dark.png"/>
+          <p:cNvPr id="2" name="Picture 1" descr="bg-cover__1920x1080.png"/>
           <p:cNvPicPr>
             <a:picLocks noChangeAspect="1"/>
           </p:cNvPicPr>
@@ -3273,66 +3109,54 @@
         </p:blipFill>
         <p:spPr>
           <a:xfrm>
-            <a:off x="502920" y="1051560"/>
-            <a:ext cx="4114800" cy="1165034"/>
+            <a:off x="0" y="0"/>
+            <a:ext cx="12191695" cy="6858000"/>
           </a:xfrm>
           <a:prstGeom prst="rect">
             <a:avLst/>
           </a:prstGeom>
         </p:spPr>
       </p:pic>
-      <p:sp>
-        <p:nvSpPr>
-          <p:cNvPr id="7" name="TextBox 6"/>
-          <p:cNvSpPr txBox="1"/>
-          <p:nvPr/>
-        </p:nvSpPr>
-        <p:spPr>
-          <a:xfrm>
-            <a:off x="502920" y="2788920"/>
-            <a:ext cx="6400800" cy="1005840"/>
-          </a:xfrm>
-          <a:prstGeom prst="rect">
-            <a:avLst/>
-          </a:prstGeom>
-          <a:noFill/>
-        </p:spPr>
-        <p:txBody>
-          <a:bodyPr wrap="square">
-            <a:spAutoFit/>
-          </a:bodyPr>
-          <a:lstStyle/>
-          <a:p>
-            <a:pPr algn="l"/>
-            <a:r>
-              <a:rPr sz="2000" b="0" i="0">
-                <a:solidFill>
-                  <a:srgbClr val="9AA4B6"/>
-                </a:solidFill>
-                <a:latin typeface="Montserrat"/>
-              </a:rPr>
-              <a:t>Умный AI-помощник для организации
-мероприятий под ключ</a:t>
-            </a:r>
-          </a:p>
-        </p:txBody>
-      </p:sp>
-      <p:sp>
-        <p:nvSpPr>
-          <p:cNvPr id="8" name="Rectangle 7"/>
+      <p:pic>
+        <p:nvPicPr>
+          <p:cNvPr id="3" name="Picture 2" descr="logo-dark.png"/>
+          <p:cNvPicPr>
+            <a:picLocks noChangeAspect="1"/>
+          </p:cNvPicPr>
+          <p:nvPr/>
+        </p:nvPicPr>
+        <p:blipFill>
+          <a:blip r:embed="rId3"/>
+          <a:stretch>
+            <a:fillRect/>
+          </a:stretch>
+        </p:blipFill>
+        <p:spPr>
+          <a:xfrm>
+            <a:off x="3901287" y="1371600"/>
+            <a:ext cx="4389120" cy="1242703"/>
+          </a:xfrm>
+          <a:prstGeom prst="rect">
+            <a:avLst/>
+          </a:prstGeom>
+        </p:spPr>
+      </p:pic>
+      <p:sp>
+        <p:nvSpPr>
+          <p:cNvPr id="4" name="Rectangle 3"/>
           <p:cNvSpPr/>
           <p:nvPr/>
         </p:nvSpPr>
         <p:spPr>
           <a:xfrm>
-            <a:off x="502920" y="3977639"/>
-            <a:ext cx="5943600" cy="18288"/>
+            <a:off x="5455767" y="2697480"/>
+            <a:ext cx="1280160" cy="25400"/>
           </a:xfrm>
           <a:prstGeom prst="rect">
             <a:avLst/>
           </a:prstGeom>
           <a:solidFill>
-            <a:srgbClr val="222D40"/>
+            <a:srgbClr val="2C7BFF"/>
           </a:solidFill>
           <a:ln>
             <a:noFill/>
@@ -3362,14 +3186,14 @@
       </p:sp>
       <p:sp>
         <p:nvSpPr>
-          <p:cNvPr id="9" name="TextBox 8"/>
+          <p:cNvPr id="5" name="TextBox 4"/>
           <p:cNvSpPr txBox="1"/>
           <p:nvPr/>
         </p:nvSpPr>
         <p:spPr>
           <a:xfrm>
-            <a:off x="502920" y="4114800"/>
-            <a:ext cx="4572000" cy="365760"/>
+            <a:off x="685800" y="2907792"/>
+            <a:ext cx="10820095" cy="411480"/>
           </a:xfrm>
           <a:prstGeom prst="rect">
             <a:avLst/>
@@ -3382,29 +3206,29 @@
           </a:bodyPr>
           <a:lstStyle/>
           <a:p>
-            <a:pPr algn="l"/>
-            <a:r>
-              <a:rPr sz="1200" b="0" i="0">
-                <a:solidFill>
-                  <a:srgbClr val="5C657A"/>
-                </a:solidFill>
-                <a:latin typeface="Arial"/>
+            <a:pPr algn="ctr"/>
+            <a:r>
+              <a:rPr sz="1200" b="0">
+                <a:solidFill>
+                  <a:srgbClr val="5AA0FF"/>
+                </a:solidFill>
+                <a:latin typeface="JetBrains Mono"/>
               </a:rPr>
-              <a:t>Алматы  ·  Казахстан  ·  2026</a:t>
-            </a:r>
-          </a:p>
-        </p:txBody>
-      </p:sp>
-      <p:sp>
-        <p:nvSpPr>
-          <p:cNvPr id="10" name="TextBox 9"/>
+              <a:t>ИНВЕСТИЦИОННАЯ ПРЕЗЕНТАЦИЯ</a:t>
+            </a:r>
+          </a:p>
+        </p:txBody>
+      </p:sp>
+      <p:sp>
+        <p:nvSpPr>
+          <p:cNvPr id="6" name="TextBox 5"/>
           <p:cNvSpPr txBox="1"/>
           <p:nvPr/>
         </p:nvSpPr>
         <p:spPr>
           <a:xfrm>
-            <a:off x="7680960" y="2560320"/>
-            <a:ext cx="4572000" cy="914400"/>
+            <a:off x="1981047" y="3364992"/>
+            <a:ext cx="8229600" cy="1371600"/>
           </a:xfrm>
           <a:prstGeom prst="rect">
             <a:avLst/>
@@ -3417,29 +3241,30 @@
           </a:bodyPr>
           <a:lstStyle/>
           <a:p>
-            <a:pPr algn="l"/>
-            <a:r>
-              <a:rPr sz="4800" b="1" i="0">
-                <a:solidFill>
-                  <a:srgbClr val="152542"/>
-                </a:solidFill>
-                <a:latin typeface="Montserrat"/>
+            <a:pPr algn="ctr"/>
+            <a:r>
+              <a:rPr sz="3000" b="1">
+                <a:solidFill>
+                  <a:srgbClr val="EEF1F8"/>
+                </a:solidFill>
+                <a:latin typeface="Space Grotesk"/>
               </a:rPr>
-              <a:t>EVENT AI</a:t>
-            </a:r>
-          </a:p>
-        </p:txBody>
-      </p:sp>
-      <p:sp>
-        <p:nvSpPr>
-          <p:cNvPr id="11" name="TextBox 10"/>
+              <a:t>Умный AI-помощник для организации
+мероприятий под ключ</a:t>
+            </a:r>
+          </a:p>
+        </p:txBody>
+      </p:sp>
+      <p:sp>
+        <p:nvSpPr>
+          <p:cNvPr id="7" name="TextBox 6"/>
           <p:cNvSpPr txBox="1"/>
           <p:nvPr/>
         </p:nvSpPr>
         <p:spPr>
           <a:xfrm>
-            <a:off x="7680960" y="3337560"/>
-            <a:ext cx="4572000" cy="457200"/>
+            <a:off x="685800" y="6035040"/>
+            <a:ext cx="10820095" cy="411480"/>
           </a:xfrm>
           <a:prstGeom prst="rect">
             <a:avLst/>
@@ -3452,15 +3277,15 @@
           </a:bodyPr>
           <a:lstStyle/>
           <a:p>
-            <a:pPr algn="l"/>
-            <a:r>
-              <a:rPr sz="2200" b="1" i="0">
-                <a:solidFill>
-                  <a:srgbClr val="152542"/>
+            <a:pPr algn="ctr"/>
+            <a:r>
+              <a:rPr sz="1400" b="0">
+                <a:solidFill>
+                  <a:srgbClr val="9AA4B6"/>
                 </a:solidFill>
                 <a:latin typeface="Montserrat"/>
               </a:rPr>
-              <a:t>PLATFORM</a:t>
+              <a:t>Алматы  ·  Казахстан  ·  2026</a:t>
             </a:r>
           </a:p>
         </p:txBody>
@@ -3483,95 +3308,9 @@
         <p:nvPr/>
       </p:nvGrpSpPr>
       <p:grpSpPr/>
-      <p:sp>
-        <p:nvSpPr>
-          <p:cNvPr id="2" name="Rectangle 1"/>
-          <p:cNvSpPr/>
-          <p:nvPr/>
-        </p:nvSpPr>
-        <p:spPr>
-          <a:xfrm>
-            <a:off x="0" y="0"/>
-            <a:ext cx="12191695" cy="6858000"/>
-          </a:xfrm>
-          <a:prstGeom prst="rect">
-            <a:avLst/>
-          </a:prstGeom>
-          <a:solidFill>
-            <a:srgbClr val="04060B"/>
-          </a:solidFill>
-          <a:ln>
-            <a:noFill/>
-          </a:ln>
-        </p:spPr>
-        <p:style>
-          <a:lnRef idx="1">
-            <a:schemeClr val="accent1"/>
-          </a:lnRef>
-          <a:fillRef idx="3">
-            <a:schemeClr val="accent1"/>
-          </a:fillRef>
-          <a:effectRef idx="2">
-            <a:schemeClr val="accent1"/>
-          </a:effectRef>
-          <a:fontRef idx="minor">
-            <a:schemeClr val="lt1"/>
-          </a:fontRef>
-        </p:style>
-        <p:txBody>
-          <a:bodyPr rtlCol="0" anchor="ctr"/>
-          <a:lstStyle/>
-          <a:p>
-            <a:pPr algn="ctr"/>
-          </a:p>
-        </p:txBody>
-      </p:sp>
-      <p:sp>
-        <p:nvSpPr>
-          <p:cNvPr id="3" name="Rectangle 2"/>
-          <p:cNvSpPr/>
-          <p:nvPr/>
-        </p:nvSpPr>
-        <p:spPr>
-          <a:xfrm>
-            <a:off x="6858000" y="0"/>
-            <a:ext cx="5333695" cy="3200400"/>
-          </a:xfrm>
-          <a:prstGeom prst="rect">
-            <a:avLst/>
-          </a:prstGeom>
-          <a:solidFill>
-            <a:srgbClr val="0A1124"/>
-          </a:solidFill>
-          <a:ln>
-            <a:noFill/>
-          </a:ln>
-        </p:spPr>
-        <p:style>
-          <a:lnRef idx="1">
-            <a:schemeClr val="accent1"/>
-          </a:lnRef>
-          <a:fillRef idx="3">
-            <a:schemeClr val="accent1"/>
-          </a:fillRef>
-          <a:effectRef idx="2">
-            <a:schemeClr val="accent1"/>
-          </a:effectRef>
-          <a:fontRef idx="minor">
-            <a:schemeClr val="lt1"/>
-          </a:fontRef>
-        </p:style>
-        <p:txBody>
-          <a:bodyPr rtlCol="0" anchor="ctr"/>
-          <a:lstStyle/>
-          <a:p>
-            <a:pPr algn="ctr"/>
-          </a:p>
-        </p:txBody>
-      </p:sp>
       <p:pic>
         <p:nvPicPr>
-          <p:cNvPr id="4" name="Picture 3" descr="logo-dark.png"/>
+          <p:cNvPr id="2" name="Picture 1" descr="bg-content__1920x1080.png"/>
           <p:cNvPicPr>
             <a:picLocks noChangeAspect="1"/>
           </p:cNvPicPr>
@@ -3585,24 +3324,48 @@
         </p:blipFill>
         <p:spPr>
           <a:xfrm>
-            <a:off x="11098987" y="182880"/>
-            <a:ext cx="864108" cy="256031"/>
+            <a:off x="0" y="0"/>
+            <a:ext cx="12191695" cy="6858000"/>
           </a:xfrm>
           <a:prstGeom prst="rect">
             <a:avLst/>
           </a:prstGeom>
         </p:spPr>
       </p:pic>
-      <p:sp>
-        <p:nvSpPr>
-          <p:cNvPr id="5" name="TextBox 4"/>
+      <p:pic>
+        <p:nvPicPr>
+          <p:cNvPr id="3" name="Picture 2" descr="logo-dark.png"/>
+          <p:cNvPicPr>
+            <a:picLocks noChangeAspect="1"/>
+          </p:cNvPicPr>
+          <p:nvPr/>
+        </p:nvPicPr>
+        <p:blipFill>
+          <a:blip r:embed="rId3"/>
+          <a:stretch>
+            <a:fillRect/>
+          </a:stretch>
+        </p:blipFill>
+        <p:spPr>
+          <a:xfrm>
+            <a:off x="594360" y="201168"/>
+            <a:ext cx="1227242" cy="347472"/>
+          </a:xfrm>
+          <a:prstGeom prst="rect">
+            <a:avLst/>
+          </a:prstGeom>
+        </p:spPr>
+      </p:pic>
+      <p:sp>
+        <p:nvSpPr>
+          <p:cNvPr id="4" name="TextBox 3"/>
           <p:cNvSpPr txBox="1"/>
           <p:nvPr/>
         </p:nvSpPr>
         <p:spPr>
           <a:xfrm>
-            <a:off x="502920" y="228600"/>
-            <a:ext cx="5486400" cy="320040"/>
+            <a:off x="11185855" y="502920"/>
+            <a:ext cx="731520" cy="365760"/>
           </a:xfrm>
           <a:prstGeom prst="rect">
             <a:avLst/>
@@ -3615,29 +3378,29 @@
           </a:bodyPr>
           <a:lstStyle/>
           <a:p>
-            <a:pPr algn="l"/>
-            <a:r>
-              <a:rPr sz="1100" b="1" i="0">
-                <a:solidFill>
-                  <a:srgbClr val="2C7BFF"/>
-                </a:solidFill>
-                <a:latin typeface="Arial"/>
+            <a:pPr algn="r"/>
+            <a:r>
+              <a:rPr sz="1100" b="0">
+                <a:solidFill>
+                  <a:srgbClr val="9AA4B6"/>
+                </a:solidFill>
+                <a:latin typeface="JetBrains Mono"/>
               </a:rPr>
-              <a:t>ПРОБЛЕМА</a:t>
-            </a:r>
-          </a:p>
-        </p:txBody>
-      </p:sp>
-      <p:sp>
-        <p:nvSpPr>
-          <p:cNvPr id="6" name="TextBox 5"/>
+              <a:t>01</a:t>
+            </a:r>
+          </a:p>
+        </p:txBody>
+      </p:sp>
+      <p:sp>
+        <p:nvSpPr>
+          <p:cNvPr id="5" name="TextBox 4"/>
           <p:cNvSpPr txBox="1"/>
           <p:nvPr/>
         </p:nvSpPr>
         <p:spPr>
           <a:xfrm>
-            <a:off x="502920" y="502920"/>
-            <a:ext cx="10515600" cy="1188720"/>
+            <a:off x="685800" y="502920"/>
+            <a:ext cx="10820095" cy="320040"/>
           </a:xfrm>
           <a:prstGeom prst="rect">
             <a:avLst/>
@@ -3652,14 +3415,48 @@
           <a:p>
             <a:pPr algn="l"/>
             <a:r>
-              <a:rPr sz="3400" b="1" i="0">
+              <a:rPr sz="1100" b="0">
+                <a:solidFill>
+                  <a:srgbClr val="5AA0FF"/>
+                </a:solidFill>
+                <a:latin typeface="JetBrains Mono"/>
+              </a:rPr>
+              <a:t>ПРОБЛЕМА</a:t>
+            </a:r>
+          </a:p>
+        </p:txBody>
+      </p:sp>
+      <p:sp>
+        <p:nvSpPr>
+          <p:cNvPr id="6" name="TextBox 5"/>
+          <p:cNvSpPr txBox="1"/>
+          <p:nvPr/>
+        </p:nvSpPr>
+        <p:spPr>
+          <a:xfrm>
+            <a:off x="685800" y="868680"/>
+            <a:ext cx="10820095" cy="1005840"/>
+          </a:xfrm>
+          <a:prstGeom prst="rect">
+            <a:avLst/>
+          </a:prstGeom>
+          <a:noFill/>
+        </p:spPr>
+        <p:txBody>
+          <a:bodyPr wrap="square">
+            <a:spAutoFit/>
+          </a:bodyPr>
+          <a:lstStyle/>
+          <a:p>
+            <a:pPr algn="l"/>
+            <a:r>
+              <a:rPr sz="3200" b="1">
                 <a:solidFill>
                   <a:srgbClr val="EEF1F8"/>
                 </a:solidFill>
-                <a:latin typeface="Montserrat"/>
+                <a:latin typeface="Space Grotesk"/>
               </a:rPr>
-              <a:t>Организация мероприятий сегодня —
-сложный и долгий процесс</a:t>
+              <a:t>Организация мероприятий — сложно и долго</a:t>
             </a:r>
           </a:p>
         </p:txBody>
@@ -3672,51 +3469,8 @@
         </p:nvSpPr>
         <p:spPr>
           <a:xfrm>
-            <a:off x="502920" y="1691640"/>
-            <a:ext cx="11155680" cy="18288"/>
-          </a:xfrm>
-          <a:prstGeom prst="rect">
-            <a:avLst/>
-          </a:prstGeom>
-          <a:solidFill>
-            <a:srgbClr val="222D40"/>
-          </a:solidFill>
-          <a:ln>
-            <a:noFill/>
-          </a:ln>
-        </p:spPr>
-        <p:style>
-          <a:lnRef idx="1">
-            <a:schemeClr val="accent1"/>
-          </a:lnRef>
-          <a:fillRef idx="3">
-            <a:schemeClr val="accent1"/>
-          </a:fillRef>
-          <a:effectRef idx="2">
-            <a:schemeClr val="accent1"/>
-          </a:effectRef>
-          <a:fontRef idx="minor">
-            <a:schemeClr val="lt1"/>
-          </a:fontRef>
-        </p:style>
-        <p:txBody>
-          <a:bodyPr rtlCol="0" anchor="ctr"/>
-          <a:lstStyle/>
-          <a:p>
-            <a:pPr algn="ctr"/>
-          </a:p>
-        </p:txBody>
-      </p:sp>
-      <p:sp>
-        <p:nvSpPr>
-          <p:cNvPr id="8" name="Rectangle 7"/>
-          <p:cNvSpPr/>
-          <p:nvPr/>
-        </p:nvSpPr>
-        <p:spPr>
-          <a:xfrm>
-            <a:off x="502920" y="1874519"/>
-            <a:ext cx="54864" cy="676656"/>
+            <a:off x="685800" y="2011680"/>
+            <a:ext cx="640080" cy="12700"/>
           </a:xfrm>
           <a:prstGeom prst="rect">
             <a:avLst/>
@@ -3752,24 +3506,26 @@
       </p:sp>
       <p:sp>
         <p:nvSpPr>
-          <p:cNvPr id="9" name="Rectangle 8"/>
+          <p:cNvPr id="8" name="Rectangle 7"/>
           <p:cNvSpPr/>
           <p:nvPr/>
         </p:nvSpPr>
         <p:spPr>
           <a:xfrm>
-            <a:off x="621792" y="1874519"/>
-            <a:ext cx="11045952" cy="676656"/>
+            <a:off x="856335" y="2212848"/>
+            <a:ext cx="3383280" cy="1508760"/>
           </a:xfrm>
           <a:prstGeom prst="rect">
             <a:avLst/>
           </a:prstGeom>
           <a:solidFill>
-            <a:srgbClr val="0D1527"/>
+            <a:srgbClr val="0A0F1C">
+              <a:alpha val="100000"/>
+            </a:srgbClr>
           </a:solidFill>
-          <a:ln w="6350">
+          <a:ln w="9525">
             <a:solidFill>
-              <a:srgbClr val="222D40"/>
+              <a:srgbClr val="1A284D"/>
             </a:solidFill>
           </a:ln>
         </p:spPr>
@@ -3797,14 +3553,14 @@
       </p:sp>
       <p:sp>
         <p:nvSpPr>
-          <p:cNvPr id="10" name="TextBox 9"/>
+          <p:cNvPr id="9" name="TextBox 8"/>
           <p:cNvSpPr txBox="1"/>
           <p:nvPr/>
         </p:nvSpPr>
         <p:spPr>
           <a:xfrm>
-            <a:off x="868680" y="2029967"/>
-            <a:ext cx="10515600" cy="493776"/>
+            <a:off x="1057503" y="2377440"/>
+            <a:ext cx="548640" cy="320040"/>
           </a:xfrm>
           <a:prstGeom prst="rect">
             <a:avLst/>
@@ -3817,14 +3573,50 @@
           </a:bodyPr>
           <a:lstStyle/>
           <a:p>
-            <a:r>
-              <a:rPr sz="1600">
+            <a:pPr algn="l"/>
+            <a:r>
+              <a:rPr sz="1100" b="0">
+                <a:solidFill>
+                  <a:srgbClr val="5AA0FF"/>
+                </a:solidFill>
+                <a:latin typeface="JetBrains Mono"/>
+              </a:rPr>
+              <a:t>01</a:t>
+            </a:r>
+          </a:p>
+        </p:txBody>
+      </p:sp>
+      <p:sp>
+        <p:nvSpPr>
+          <p:cNvPr id="10" name="TextBox 9"/>
+          <p:cNvSpPr txBox="1"/>
+          <p:nvPr/>
+        </p:nvSpPr>
+        <p:spPr>
+          <a:xfrm>
+            <a:off x="1057503" y="2761488"/>
+            <a:ext cx="2980944" cy="822960"/>
+          </a:xfrm>
+          <a:prstGeom prst="rect">
+            <a:avLst/>
+          </a:prstGeom>
+          <a:noFill/>
+        </p:spPr>
+        <p:txBody>
+          <a:bodyPr wrap="square">
+            <a:spAutoFit/>
+          </a:bodyPr>
+          <a:lstStyle/>
+          <a:p>
+            <a:pPr algn="l"/>
+            <a:r>
+              <a:rPr sz="1700" b="1">
                 <a:solidFill>
                   <a:srgbClr val="EEF1F8"/>
                 </a:solidFill>
-                <a:latin typeface="Montserrat"/>
+                <a:latin typeface="Space Grotesk"/>
               </a:rPr>
-              <a:t>Клиент не знает, с чего начать</a:t>
+              <a:t>Не знаешь, с чего начать</a:t>
             </a:r>
           </a:p>
         </p:txBody>
@@ -3837,17 +3629,21 @@
         </p:nvSpPr>
         <p:spPr>
           <a:xfrm>
-            <a:off x="502920" y="2670048"/>
-            <a:ext cx="54864" cy="676656"/>
+            <a:off x="4404207" y="2212848"/>
+            <a:ext cx="3383280" cy="1508760"/>
           </a:xfrm>
           <a:prstGeom prst="rect">
             <a:avLst/>
           </a:prstGeom>
           <a:solidFill>
-            <a:srgbClr val="2C7BFF"/>
+            <a:srgbClr val="0A0F1C">
+              <a:alpha val="100000"/>
+            </a:srgbClr>
           </a:solidFill>
-          <a:ln>
-            <a:noFill/>
+          <a:ln w="9525">
+            <a:solidFill>
+              <a:srgbClr val="1A284D"/>
+            </a:solidFill>
           </a:ln>
         </p:spPr>
         <p:style>
@@ -3874,24 +3670,97 @@
       </p:sp>
       <p:sp>
         <p:nvSpPr>
-          <p:cNvPr id="12" name="Rectangle 11"/>
+          <p:cNvPr id="12" name="TextBox 11"/>
+          <p:cNvSpPr txBox="1"/>
+          <p:nvPr/>
+        </p:nvSpPr>
+        <p:spPr>
+          <a:xfrm>
+            <a:off x="4605375" y="2377440"/>
+            <a:ext cx="548640" cy="320040"/>
+          </a:xfrm>
+          <a:prstGeom prst="rect">
+            <a:avLst/>
+          </a:prstGeom>
+          <a:noFill/>
+        </p:spPr>
+        <p:txBody>
+          <a:bodyPr wrap="square">
+            <a:spAutoFit/>
+          </a:bodyPr>
+          <a:lstStyle/>
+          <a:p>
+            <a:pPr algn="l"/>
+            <a:r>
+              <a:rPr sz="1100" b="0">
+                <a:solidFill>
+                  <a:srgbClr val="5AA0FF"/>
+                </a:solidFill>
+                <a:latin typeface="JetBrains Mono"/>
+              </a:rPr>
+              <a:t>02</a:t>
+            </a:r>
+          </a:p>
+        </p:txBody>
+      </p:sp>
+      <p:sp>
+        <p:nvSpPr>
+          <p:cNvPr id="13" name="TextBox 12"/>
+          <p:cNvSpPr txBox="1"/>
+          <p:nvPr/>
+        </p:nvSpPr>
+        <p:spPr>
+          <a:xfrm>
+            <a:off x="4605375" y="2761488"/>
+            <a:ext cx="2980944" cy="822960"/>
+          </a:xfrm>
+          <a:prstGeom prst="rect">
+            <a:avLst/>
+          </a:prstGeom>
+          <a:noFill/>
+        </p:spPr>
+        <p:txBody>
+          <a:bodyPr wrap="square">
+            <a:spAutoFit/>
+          </a:bodyPr>
+          <a:lstStyle/>
+          <a:p>
+            <a:pPr algn="l"/>
+            <a:r>
+              <a:rPr sz="1700" b="1">
+                <a:solidFill>
+                  <a:srgbClr val="EEF1F8"/>
+                </a:solidFill>
+                <a:latin typeface="Space Grotesk"/>
+              </a:rPr>
+              <a:t>Площадку, ведущих, артистов
+ищешь по отдельности</a:t>
+            </a:r>
+          </a:p>
+        </p:txBody>
+      </p:sp>
+      <p:sp>
+        <p:nvSpPr>
+          <p:cNvPr id="14" name="Rectangle 13"/>
           <p:cNvSpPr/>
           <p:nvPr/>
         </p:nvSpPr>
         <p:spPr>
           <a:xfrm>
-            <a:off x="621792" y="2670048"/>
-            <a:ext cx="11045952" cy="676656"/>
+            <a:off x="7952079" y="2212848"/>
+            <a:ext cx="3383280" cy="1508760"/>
           </a:xfrm>
           <a:prstGeom prst="rect">
             <a:avLst/>
           </a:prstGeom>
           <a:solidFill>
-            <a:srgbClr val="0D1527"/>
+            <a:srgbClr val="0A0F1C">
+              <a:alpha val="100000"/>
+            </a:srgbClr>
           </a:solidFill>
-          <a:ln w="6350">
+          <a:ln w="9525">
             <a:solidFill>
-              <a:srgbClr val="222D40"/>
+              <a:srgbClr val="1A284D"/>
             </a:solidFill>
           </a:ln>
         </p:spPr>
@@ -3919,14 +3788,14 @@
       </p:sp>
       <p:sp>
         <p:nvSpPr>
-          <p:cNvPr id="13" name="TextBox 12"/>
+          <p:cNvPr id="15" name="TextBox 14"/>
           <p:cNvSpPr txBox="1"/>
           <p:nvPr/>
         </p:nvSpPr>
         <p:spPr>
           <a:xfrm>
-            <a:off x="868680" y="2825496"/>
-            <a:ext cx="10515600" cy="493776"/>
+            <a:off x="8153247" y="2377440"/>
+            <a:ext cx="548640" cy="320040"/>
           </a:xfrm>
           <a:prstGeom prst="rect">
             <a:avLst/>
@@ -3939,37 +3808,77 @@
           </a:bodyPr>
           <a:lstStyle/>
           <a:p>
-            <a:r>
-              <a:rPr sz="1600">
+            <a:pPr algn="l"/>
+            <a:r>
+              <a:rPr sz="1100" b="0">
+                <a:solidFill>
+                  <a:srgbClr val="5AA0FF"/>
+                </a:solidFill>
+                <a:latin typeface="JetBrains Mono"/>
+              </a:rPr>
+              <a:t>03</a:t>
+            </a:r>
+          </a:p>
+        </p:txBody>
+      </p:sp>
+      <p:sp>
+        <p:nvSpPr>
+          <p:cNvPr id="16" name="TextBox 15"/>
+          <p:cNvSpPr txBox="1"/>
+          <p:nvPr/>
+        </p:nvSpPr>
+        <p:spPr>
+          <a:xfrm>
+            <a:off x="8153247" y="2761488"/>
+            <a:ext cx="2980944" cy="822960"/>
+          </a:xfrm>
+          <a:prstGeom prst="rect">
+            <a:avLst/>
+          </a:prstGeom>
+          <a:noFill/>
+        </p:spPr>
+        <p:txBody>
+          <a:bodyPr wrap="square">
+            <a:spAutoFit/>
+          </a:bodyPr>
+          <a:lstStyle/>
+          <a:p>
+            <a:pPr algn="l"/>
+            <a:r>
+              <a:rPr sz="1700" b="1">
                 <a:solidFill>
                   <a:srgbClr val="EEF1F8"/>
                 </a:solidFill>
-                <a:latin typeface="Montserrat"/>
+                <a:latin typeface="Space Grotesk"/>
               </a:rPr>
-              <a:t>Площадку, ведущих, артистов, декор, фото-видео нужно искать отдельно</a:t>
-            </a:r>
-          </a:p>
-        </p:txBody>
-      </p:sp>
-      <p:sp>
-        <p:nvSpPr>
-          <p:cNvPr id="14" name="Rectangle 13"/>
+              <a:t>Нет прозрачной сметы</a:t>
+            </a:r>
+          </a:p>
+        </p:txBody>
+      </p:sp>
+      <p:sp>
+        <p:nvSpPr>
+          <p:cNvPr id="17" name="Rectangle 16"/>
           <p:cNvSpPr/>
           <p:nvPr/>
         </p:nvSpPr>
         <p:spPr>
           <a:xfrm>
-            <a:off x="502920" y="3465576"/>
-            <a:ext cx="54864" cy="676656"/>
+            <a:off x="2630271" y="3886200"/>
+            <a:ext cx="3383280" cy="1508760"/>
           </a:xfrm>
           <a:prstGeom prst="rect">
             <a:avLst/>
           </a:prstGeom>
           <a:solidFill>
-            <a:srgbClr val="2C7BFF"/>
+            <a:srgbClr val="0A0F1C">
+              <a:alpha val="100000"/>
+            </a:srgbClr>
           </a:solidFill>
-          <a:ln>
-            <a:noFill/>
+          <a:ln w="9525">
+            <a:solidFill>
+              <a:srgbClr val="1A284D"/>
+            </a:solidFill>
           </a:ln>
         </p:spPr>
         <p:style>
@@ -3996,24 +3905,97 @@
       </p:sp>
       <p:sp>
         <p:nvSpPr>
-          <p:cNvPr id="15" name="Rectangle 14"/>
+          <p:cNvPr id="18" name="TextBox 17"/>
+          <p:cNvSpPr txBox="1"/>
+          <p:nvPr/>
+        </p:nvSpPr>
+        <p:spPr>
+          <a:xfrm>
+            <a:off x="2831439" y="4050792"/>
+            <a:ext cx="548640" cy="320040"/>
+          </a:xfrm>
+          <a:prstGeom prst="rect">
+            <a:avLst/>
+          </a:prstGeom>
+          <a:noFill/>
+        </p:spPr>
+        <p:txBody>
+          <a:bodyPr wrap="square">
+            <a:spAutoFit/>
+          </a:bodyPr>
+          <a:lstStyle/>
+          <a:p>
+            <a:pPr algn="l"/>
+            <a:r>
+              <a:rPr sz="1100" b="0">
+                <a:solidFill>
+                  <a:srgbClr val="5AA0FF"/>
+                </a:solidFill>
+                <a:latin typeface="JetBrains Mono"/>
+              </a:rPr>
+              <a:t>04</a:t>
+            </a:r>
+          </a:p>
+        </p:txBody>
+      </p:sp>
+      <p:sp>
+        <p:nvSpPr>
+          <p:cNvPr id="19" name="TextBox 18"/>
+          <p:cNvSpPr txBox="1"/>
+          <p:nvPr/>
+        </p:nvSpPr>
+        <p:spPr>
+          <a:xfrm>
+            <a:off x="2831439" y="4434840"/>
+            <a:ext cx="2980944" cy="822960"/>
+          </a:xfrm>
+          <a:prstGeom prst="rect">
+            <a:avLst/>
+          </a:prstGeom>
+          <a:noFill/>
+        </p:spPr>
+        <p:txBody>
+          <a:bodyPr wrap="square">
+            <a:spAutoFit/>
+          </a:bodyPr>
+          <a:lstStyle/>
+          <a:p>
+            <a:pPr algn="l"/>
+            <a:r>
+              <a:rPr sz="1700" b="1">
+                <a:solidFill>
+                  <a:srgbClr val="EEF1F8"/>
+                </a:solidFill>
+                <a:latin typeface="Space Grotesk"/>
+              </a:rPr>
+              <a:t>Сложно сравнить
+подрядчиков</a:t>
+            </a:r>
+          </a:p>
+        </p:txBody>
+      </p:sp>
+      <p:sp>
+        <p:nvSpPr>
+          <p:cNvPr id="20" name="Rectangle 19"/>
           <p:cNvSpPr/>
           <p:nvPr/>
         </p:nvSpPr>
         <p:spPr>
           <a:xfrm>
-            <a:off x="621792" y="3465576"/>
-            <a:ext cx="11045952" cy="676656"/>
+            <a:off x="6178143" y="3886200"/>
+            <a:ext cx="3383280" cy="1508760"/>
           </a:xfrm>
           <a:prstGeom prst="rect">
             <a:avLst/>
           </a:prstGeom>
           <a:solidFill>
-            <a:srgbClr val="0D1527"/>
+            <a:srgbClr val="0A0F1C">
+              <a:alpha val="100000"/>
+            </a:srgbClr>
           </a:solidFill>
-          <a:ln w="6350">
+          <a:ln w="9525">
             <a:solidFill>
-              <a:srgbClr val="222D40"/>
+              <a:srgbClr val="1A284D"/>
             </a:solidFill>
           </a:ln>
         </p:spPr>
@@ -4041,14 +4023,14 @@
       </p:sp>
       <p:sp>
         <p:nvSpPr>
-          <p:cNvPr id="16" name="TextBox 15"/>
+          <p:cNvPr id="21" name="TextBox 20"/>
           <p:cNvSpPr txBox="1"/>
           <p:nvPr/>
         </p:nvSpPr>
         <p:spPr>
           <a:xfrm>
-            <a:off x="868680" y="3621024"/>
-            <a:ext cx="10515600" cy="493776"/>
+            <a:off x="6379311" y="4050792"/>
+            <a:ext cx="548640" cy="320040"/>
           </a:xfrm>
           <a:prstGeom prst="rect">
             <a:avLst/>
@@ -4061,116 +4043,29 @@
           </a:bodyPr>
           <a:lstStyle/>
           <a:p>
-            <a:r>
-              <a:rPr sz="1600">
-                <a:solidFill>
-                  <a:srgbClr val="EEF1F8"/>
-                </a:solidFill>
-                <a:latin typeface="Montserrat"/>
+            <a:pPr algn="l"/>
+            <a:r>
+              <a:rPr sz="1100" b="0">
+                <a:solidFill>
+                  <a:srgbClr val="5AA0FF"/>
+                </a:solidFill>
+                <a:latin typeface="JetBrains Mono"/>
               </a:rPr>
-              <a:t>Нет прозрачной сметы</a:t>
-            </a:r>
-          </a:p>
-        </p:txBody>
-      </p:sp>
-      <p:sp>
-        <p:nvSpPr>
-          <p:cNvPr id="17" name="Rectangle 16"/>
-          <p:cNvSpPr/>
-          <p:nvPr/>
-        </p:nvSpPr>
-        <p:spPr>
-          <a:xfrm>
-            <a:off x="502920" y="4261104"/>
-            <a:ext cx="54864" cy="676656"/>
-          </a:xfrm>
-          <a:prstGeom prst="rect">
-            <a:avLst/>
-          </a:prstGeom>
-          <a:solidFill>
-            <a:srgbClr val="2C7BFF"/>
-          </a:solidFill>
-          <a:ln>
-            <a:noFill/>
-          </a:ln>
-        </p:spPr>
-        <p:style>
-          <a:lnRef idx="1">
-            <a:schemeClr val="accent1"/>
-          </a:lnRef>
-          <a:fillRef idx="3">
-            <a:schemeClr val="accent1"/>
-          </a:fillRef>
-          <a:effectRef idx="2">
-            <a:schemeClr val="accent1"/>
-          </a:effectRef>
-          <a:fontRef idx="minor">
-            <a:schemeClr val="lt1"/>
-          </a:fontRef>
-        </p:style>
-        <p:txBody>
-          <a:bodyPr rtlCol="0" anchor="ctr"/>
-          <a:lstStyle/>
-          <a:p>
-            <a:pPr algn="ctr"/>
-          </a:p>
-        </p:txBody>
-      </p:sp>
-      <p:sp>
-        <p:nvSpPr>
-          <p:cNvPr id="18" name="Rectangle 17"/>
-          <p:cNvSpPr/>
-          <p:nvPr/>
-        </p:nvSpPr>
-        <p:spPr>
-          <a:xfrm>
-            <a:off x="621792" y="4261104"/>
-            <a:ext cx="11045952" cy="676656"/>
-          </a:xfrm>
-          <a:prstGeom prst="rect">
-            <a:avLst/>
-          </a:prstGeom>
-          <a:solidFill>
-            <a:srgbClr val="0D1527"/>
-          </a:solidFill>
-          <a:ln w="6350">
-            <a:solidFill>
-              <a:srgbClr val="222D40"/>
-            </a:solidFill>
-          </a:ln>
-        </p:spPr>
-        <p:style>
-          <a:lnRef idx="1">
-            <a:schemeClr val="accent1"/>
-          </a:lnRef>
-          <a:fillRef idx="3">
-            <a:schemeClr val="accent1"/>
-          </a:fillRef>
-          <a:effectRef idx="2">
-            <a:schemeClr val="accent1"/>
-          </a:effectRef>
-          <a:fontRef idx="minor">
-            <a:schemeClr val="lt1"/>
-          </a:fontRef>
-        </p:style>
-        <p:txBody>
-          <a:bodyPr rtlCol="0" anchor="ctr"/>
-          <a:lstStyle/>
-          <a:p>
-            <a:pPr algn="ctr"/>
-          </a:p>
-        </p:txBody>
-      </p:sp>
-      <p:sp>
-        <p:nvSpPr>
-          <p:cNvPr id="19" name="TextBox 18"/>
+              <a:t>05</a:t>
+            </a:r>
+          </a:p>
+        </p:txBody>
+      </p:sp>
+      <p:sp>
+        <p:nvSpPr>
+          <p:cNvPr id="22" name="TextBox 21"/>
           <p:cNvSpPr txBox="1"/>
           <p:nvPr/>
         </p:nvSpPr>
         <p:spPr>
           <a:xfrm>
-            <a:off x="868680" y="4416552"/>
-            <a:ext cx="10515600" cy="493776"/>
+            <a:off x="6379311" y="4434840"/>
+            <a:ext cx="2980944" cy="822960"/>
           </a:xfrm>
           <a:prstGeom prst="rect">
             <a:avLst/>
@@ -4183,136 +4078,16 @@
           </a:bodyPr>
           <a:lstStyle/>
           <a:p>
-            <a:r>
-              <a:rPr sz="1600">
+            <a:pPr algn="l"/>
+            <a:r>
+              <a:rPr sz="1700" b="1">
                 <a:solidFill>
                   <a:srgbClr val="EEF1F8"/>
                 </a:solidFill>
-                <a:latin typeface="Montserrat"/>
+                <a:latin typeface="Space Grotesk"/>
               </a:rPr>
-              <a:t>Сложно сравнить подрядчиков</a:t>
-            </a:r>
-          </a:p>
-        </p:txBody>
-      </p:sp>
-      <p:sp>
-        <p:nvSpPr>
-          <p:cNvPr id="20" name="Rectangle 19"/>
-          <p:cNvSpPr/>
-          <p:nvPr/>
-        </p:nvSpPr>
-        <p:spPr>
-          <a:xfrm>
-            <a:off x="502920" y="5056631"/>
-            <a:ext cx="54864" cy="676656"/>
-          </a:xfrm>
-          <a:prstGeom prst="rect">
-            <a:avLst/>
-          </a:prstGeom>
-          <a:solidFill>
-            <a:srgbClr val="2C7BFF"/>
-          </a:solidFill>
-          <a:ln>
-            <a:noFill/>
-          </a:ln>
-        </p:spPr>
-        <p:style>
-          <a:lnRef idx="1">
-            <a:schemeClr val="accent1"/>
-          </a:lnRef>
-          <a:fillRef idx="3">
-            <a:schemeClr val="accent1"/>
-          </a:fillRef>
-          <a:effectRef idx="2">
-            <a:schemeClr val="accent1"/>
-          </a:effectRef>
-          <a:fontRef idx="minor">
-            <a:schemeClr val="lt1"/>
-          </a:fontRef>
-        </p:style>
-        <p:txBody>
-          <a:bodyPr rtlCol="0" anchor="ctr"/>
-          <a:lstStyle/>
-          <a:p>
-            <a:pPr algn="ctr"/>
-          </a:p>
-        </p:txBody>
-      </p:sp>
-      <p:sp>
-        <p:nvSpPr>
-          <p:cNvPr id="21" name="Rectangle 20"/>
-          <p:cNvSpPr/>
-          <p:nvPr/>
-        </p:nvSpPr>
-        <p:spPr>
-          <a:xfrm>
-            <a:off x="621792" y="5056631"/>
-            <a:ext cx="11045952" cy="676656"/>
-          </a:xfrm>
-          <a:prstGeom prst="rect">
-            <a:avLst/>
-          </a:prstGeom>
-          <a:solidFill>
-            <a:srgbClr val="0D1527"/>
-          </a:solidFill>
-          <a:ln w="6350">
-            <a:solidFill>
-              <a:srgbClr val="222D40"/>
-            </a:solidFill>
-          </a:ln>
-        </p:spPr>
-        <p:style>
-          <a:lnRef idx="1">
-            <a:schemeClr val="accent1"/>
-          </a:lnRef>
-          <a:fillRef idx="3">
-            <a:schemeClr val="accent1"/>
-          </a:fillRef>
-          <a:effectRef idx="2">
-            <a:schemeClr val="accent1"/>
-          </a:effectRef>
-          <a:fontRef idx="minor">
-            <a:schemeClr val="lt1"/>
-          </a:fontRef>
-        </p:style>
-        <p:txBody>
-          <a:bodyPr rtlCol="0" anchor="ctr"/>
-          <a:lstStyle/>
-          <a:p>
-            <a:pPr algn="ctr"/>
-          </a:p>
-        </p:txBody>
-      </p:sp>
-      <p:sp>
-        <p:nvSpPr>
-          <p:cNvPr id="22" name="TextBox 21"/>
-          <p:cNvSpPr txBox="1"/>
-          <p:nvPr/>
-        </p:nvSpPr>
-        <p:spPr>
-          <a:xfrm>
-            <a:off x="868680" y="5212079"/>
-            <a:ext cx="10515600" cy="493776"/>
-          </a:xfrm>
-          <a:prstGeom prst="rect">
-            <a:avLst/>
-          </a:prstGeom>
-          <a:noFill/>
-        </p:spPr>
-        <p:txBody>
-          <a:bodyPr wrap="square">
-            <a:spAutoFit/>
-          </a:bodyPr>
-          <a:lstStyle/>
-          <a:p>
-            <a:r>
-              <a:rPr sz="1600">
-                <a:solidFill>
-                  <a:srgbClr val="EEF1F8"/>
-                </a:solidFill>
-                <a:latin typeface="Montserrat"/>
-              </a:rPr>
-              <a:t>Много времени уходит на звонки и согласования</a:t>
+              <a:t>Время уходит на звонки
+и согласования</a:t>
             </a:r>
           </a:p>
         </p:txBody>
@@ -4335,95 +4110,9 @@
         <p:nvPr/>
       </p:nvGrpSpPr>
       <p:grpSpPr/>
-      <p:sp>
-        <p:nvSpPr>
-          <p:cNvPr id="2" name="Rectangle 1"/>
-          <p:cNvSpPr/>
-          <p:nvPr/>
-        </p:nvSpPr>
-        <p:spPr>
-          <a:xfrm>
-            <a:off x="0" y="0"/>
-            <a:ext cx="12191695" cy="6858000"/>
-          </a:xfrm>
-          <a:prstGeom prst="rect">
-            <a:avLst/>
-          </a:prstGeom>
-          <a:solidFill>
-            <a:srgbClr val="04060B"/>
-          </a:solidFill>
-          <a:ln>
-            <a:noFill/>
-          </a:ln>
-        </p:spPr>
-        <p:style>
-          <a:lnRef idx="1">
-            <a:schemeClr val="accent1"/>
-          </a:lnRef>
-          <a:fillRef idx="3">
-            <a:schemeClr val="accent1"/>
-          </a:fillRef>
-          <a:effectRef idx="2">
-            <a:schemeClr val="accent1"/>
-          </a:effectRef>
-          <a:fontRef idx="minor">
-            <a:schemeClr val="lt1"/>
-          </a:fontRef>
-        </p:style>
-        <p:txBody>
-          <a:bodyPr rtlCol="0" anchor="ctr"/>
-          <a:lstStyle/>
-          <a:p>
-            <a:pPr algn="ctr"/>
-          </a:p>
-        </p:txBody>
-      </p:sp>
-      <p:sp>
-        <p:nvSpPr>
-          <p:cNvPr id="3" name="Rectangle 2"/>
-          <p:cNvSpPr/>
-          <p:nvPr/>
-        </p:nvSpPr>
-        <p:spPr>
-          <a:xfrm>
-            <a:off x="6858000" y="0"/>
-            <a:ext cx="5333695" cy="3200400"/>
-          </a:xfrm>
-          <a:prstGeom prst="rect">
-            <a:avLst/>
-          </a:prstGeom>
-          <a:solidFill>
-            <a:srgbClr val="0A1124"/>
-          </a:solidFill>
-          <a:ln>
-            <a:noFill/>
-          </a:ln>
-        </p:spPr>
-        <p:style>
-          <a:lnRef idx="1">
-            <a:schemeClr val="accent1"/>
-          </a:lnRef>
-          <a:fillRef idx="3">
-            <a:schemeClr val="accent1"/>
-          </a:fillRef>
-          <a:effectRef idx="2">
-            <a:schemeClr val="accent1"/>
-          </a:effectRef>
-          <a:fontRef idx="minor">
-            <a:schemeClr val="lt1"/>
-          </a:fontRef>
-        </p:style>
-        <p:txBody>
-          <a:bodyPr rtlCol="0" anchor="ctr"/>
-          <a:lstStyle/>
-          <a:p>
-            <a:pPr algn="ctr"/>
-          </a:p>
-        </p:txBody>
-      </p:sp>
       <p:pic>
         <p:nvPicPr>
-          <p:cNvPr id="4" name="Picture 3" descr="logo-dark.png"/>
+          <p:cNvPr id="2" name="Picture 1" descr="bg-content__1920x1080.png"/>
           <p:cNvPicPr>
             <a:picLocks noChangeAspect="1"/>
           </p:cNvPicPr>
@@ -4437,24 +4126,48 @@
         </p:blipFill>
         <p:spPr>
           <a:xfrm>
-            <a:off x="11098987" y="182880"/>
-            <a:ext cx="864108" cy="256031"/>
+            <a:off x="0" y="0"/>
+            <a:ext cx="12191695" cy="6858000"/>
           </a:xfrm>
           <a:prstGeom prst="rect">
             <a:avLst/>
           </a:prstGeom>
         </p:spPr>
       </p:pic>
-      <p:sp>
-        <p:nvSpPr>
-          <p:cNvPr id="5" name="TextBox 4"/>
+      <p:pic>
+        <p:nvPicPr>
+          <p:cNvPr id="3" name="Picture 2" descr="logo-dark.png"/>
+          <p:cNvPicPr>
+            <a:picLocks noChangeAspect="1"/>
+          </p:cNvPicPr>
+          <p:nvPr/>
+        </p:nvPicPr>
+        <p:blipFill>
+          <a:blip r:embed="rId3"/>
+          <a:stretch>
+            <a:fillRect/>
+          </a:stretch>
+        </p:blipFill>
+        <p:spPr>
+          <a:xfrm>
+            <a:off x="594360" y="201168"/>
+            <a:ext cx="1227242" cy="347472"/>
+          </a:xfrm>
+          <a:prstGeom prst="rect">
+            <a:avLst/>
+          </a:prstGeom>
+        </p:spPr>
+      </p:pic>
+      <p:sp>
+        <p:nvSpPr>
+          <p:cNvPr id="4" name="TextBox 3"/>
           <p:cNvSpPr txBox="1"/>
           <p:nvPr/>
         </p:nvSpPr>
         <p:spPr>
           <a:xfrm>
-            <a:off x="502920" y="228600"/>
-            <a:ext cx="5486400" cy="320040"/>
+            <a:off x="11185855" y="502920"/>
+            <a:ext cx="731520" cy="365760"/>
           </a:xfrm>
           <a:prstGeom prst="rect">
             <a:avLst/>
@@ -4467,29 +4180,29 @@
           </a:bodyPr>
           <a:lstStyle/>
           <a:p>
-            <a:pPr algn="l"/>
-            <a:r>
-              <a:rPr sz="1100" b="1" i="0">
-                <a:solidFill>
-                  <a:srgbClr val="2C7BFF"/>
-                </a:solidFill>
-                <a:latin typeface="Arial"/>
+            <a:pPr algn="r"/>
+            <a:r>
+              <a:rPr sz="1100" b="0">
+                <a:solidFill>
+                  <a:srgbClr val="9AA4B6"/>
+                </a:solidFill>
+                <a:latin typeface="JetBrains Mono"/>
               </a:rPr>
-              <a:t>РЕШЕНИЕ</a:t>
-            </a:r>
-          </a:p>
-        </p:txBody>
-      </p:sp>
-      <p:sp>
-        <p:nvSpPr>
-          <p:cNvPr id="6" name="TextBox 5"/>
+              <a:t>02</a:t>
+            </a:r>
+          </a:p>
+        </p:txBody>
+      </p:sp>
+      <p:sp>
+        <p:nvSpPr>
+          <p:cNvPr id="5" name="TextBox 4"/>
           <p:cNvSpPr txBox="1"/>
           <p:nvPr/>
         </p:nvSpPr>
         <p:spPr>
           <a:xfrm>
-            <a:off x="502920" y="502920"/>
-            <a:ext cx="10515600" cy="777240"/>
+            <a:off x="685800" y="502920"/>
+            <a:ext cx="10820095" cy="320040"/>
           </a:xfrm>
           <a:prstGeom prst="rect">
             <a:avLst/>
@@ -4504,27 +4217,27 @@
           <a:p>
             <a:pPr algn="l"/>
             <a:r>
-              <a:rPr sz="3600" b="1" i="0">
-                <a:solidFill>
-                  <a:srgbClr val="EEF1F8"/>
-                </a:solidFill>
-                <a:latin typeface="Montserrat"/>
+              <a:rPr sz="1100" b="0">
+                <a:solidFill>
+                  <a:srgbClr val="5AA0FF"/>
+                </a:solidFill>
+                <a:latin typeface="JetBrains Mono"/>
               </a:rPr>
-              <a:t>EVENT AI собирает мероприятие за клиента</a:t>
-            </a:r>
-          </a:p>
-        </p:txBody>
-      </p:sp>
-      <p:sp>
-        <p:nvSpPr>
-          <p:cNvPr id="7" name="TextBox 6"/>
+              <a:t>РЕШЕНИЕ</a:t>
+            </a:r>
+          </a:p>
+        </p:txBody>
+      </p:sp>
+      <p:sp>
+        <p:nvSpPr>
+          <p:cNvPr id="6" name="TextBox 5"/>
           <p:cNvSpPr txBox="1"/>
           <p:nvPr/>
         </p:nvSpPr>
         <p:spPr>
           <a:xfrm>
-            <a:off x="502920" y="1298448"/>
-            <a:ext cx="10058400" cy="640080"/>
+            <a:off x="685800" y="868680"/>
+            <a:ext cx="10820095" cy="685800"/>
           </a:xfrm>
           <a:prstGeom prst="rect">
             <a:avLst/>
@@ -4539,14 +4252,48 @@
           <a:p>
             <a:pPr algn="l"/>
             <a:r>
-              <a:rPr sz="1600" b="0" i="0">
+              <a:rPr sz="3600" b="1">
+                <a:solidFill>
+                  <a:srgbClr val="EEF1F8"/>
+                </a:solidFill>
+                <a:latin typeface="Space Grotesk"/>
+              </a:rPr>
+              <a:t>EVENT AI собирает мероприятие за вас</a:t>
+            </a:r>
+          </a:p>
+        </p:txBody>
+      </p:sp>
+      <p:sp>
+        <p:nvSpPr>
+          <p:cNvPr id="7" name="TextBox 6"/>
+          <p:cNvSpPr txBox="1"/>
+          <p:nvPr/>
+        </p:nvSpPr>
+        <p:spPr>
+          <a:xfrm>
+            <a:off x="685800" y="1600200"/>
+            <a:ext cx="10820095" cy="411480"/>
+          </a:xfrm>
+          <a:prstGeom prst="rect">
+            <a:avLst/>
+          </a:prstGeom>
+          <a:noFill/>
+        </p:spPr>
+        <p:txBody>
+          <a:bodyPr wrap="square">
+            <a:spAutoFit/>
+          </a:bodyPr>
+          <a:lstStyle/>
+          <a:p>
+            <a:pPr algn="l"/>
+            <a:r>
+              <a:rPr sz="1600" b="0">
                 <a:solidFill>
                   <a:srgbClr val="9AA4B6"/>
                 </a:solidFill>
                 <a:latin typeface="Montserrat"/>
               </a:rPr>
-              <a:t>Пользователь отвечает на простые вопросы в AI-чате —
-система автоматически формирует:</a:t>
+              <a:t>Ответьте на пару вопросов в AI-чате — система соберёт:</a:t>
             </a:r>
           </a:p>
         </p:txBody>
@@ -4559,51 +4306,8 @@
         </p:nvSpPr>
         <p:spPr>
           <a:xfrm>
-            <a:off x="502920" y="1965960"/>
-            <a:ext cx="11155680" cy="18288"/>
-          </a:xfrm>
-          <a:prstGeom prst="rect">
-            <a:avLst/>
-          </a:prstGeom>
-          <a:solidFill>
-            <a:srgbClr val="222D40"/>
-          </a:solidFill>
-          <a:ln>
-            <a:noFill/>
-          </a:ln>
-        </p:spPr>
-        <p:style>
-          <a:lnRef idx="1">
-            <a:schemeClr val="accent1"/>
-          </a:lnRef>
-          <a:fillRef idx="3">
-            <a:schemeClr val="accent1"/>
-          </a:fillRef>
-          <a:effectRef idx="2">
-            <a:schemeClr val="accent1"/>
-          </a:effectRef>
-          <a:fontRef idx="minor">
-            <a:schemeClr val="lt1"/>
-          </a:fontRef>
-        </p:style>
-        <p:txBody>
-          <a:bodyPr rtlCol="0" anchor="ctr"/>
-          <a:lstStyle/>
-          <a:p>
-            <a:pPr algn="ctr"/>
-          </a:p>
-        </p:txBody>
-      </p:sp>
-      <p:sp>
-        <p:nvSpPr>
-          <p:cNvPr id="9" name="Rectangle 8"/>
-          <p:cNvSpPr/>
-          <p:nvPr/>
-        </p:nvSpPr>
-        <p:spPr>
-          <a:xfrm>
-            <a:off x="502920" y="2679192"/>
-            <a:ext cx="128016" cy="128016"/>
+            <a:off x="685800" y="2103120"/>
+            <a:ext cx="640080" cy="12700"/>
           </a:xfrm>
           <a:prstGeom prst="rect">
             <a:avLst/>
@@ -4639,24 +4343,24 @@
       </p:sp>
       <p:sp>
         <p:nvSpPr>
-          <p:cNvPr id="10" name="Rectangle 9"/>
+          <p:cNvPr id="9" name="Rectangle 8"/>
           <p:cNvSpPr/>
           <p:nvPr/>
         </p:nvSpPr>
         <p:spPr>
           <a:xfrm>
-            <a:off x="731520" y="2148840"/>
-            <a:ext cx="5212080" cy="1188720"/>
+            <a:off x="685800" y="2286000"/>
+            <a:ext cx="3383280" cy="1572768"/>
           </a:xfrm>
           <a:prstGeom prst="rect">
             <a:avLst/>
           </a:prstGeom>
           <a:solidFill>
-            <a:srgbClr val="0D1527"/>
+            <a:srgbClr val="0A0F1C"/>
           </a:solidFill>
-          <a:ln w="6350">
+          <a:ln w="9525">
             <a:solidFill>
-              <a:srgbClr val="222D40"/>
+              <a:srgbClr val="1A284D"/>
             </a:solidFill>
           </a:ln>
         </p:spPr>
@@ -4684,48 +4388,14 @@
       </p:sp>
       <p:sp>
         <p:nvSpPr>
-          <p:cNvPr id="11" name="TextBox 10"/>
-          <p:cNvSpPr txBox="1"/>
-          <p:nvPr/>
-        </p:nvSpPr>
-        <p:spPr>
-          <a:xfrm>
-            <a:off x="868680" y="2404872"/>
-            <a:ext cx="4937760" cy="868680"/>
-          </a:xfrm>
-          <a:prstGeom prst="rect">
-            <a:avLst/>
-          </a:prstGeom>
-          <a:noFill/>
-        </p:spPr>
-        <p:txBody>
-          <a:bodyPr wrap="square">
-            <a:spAutoFit/>
-          </a:bodyPr>
-          <a:lstStyle/>
-          <a:p>
-            <a:r>
-              <a:rPr sz="1700" b="1">
-                <a:solidFill>
-                  <a:srgbClr val="EEF1F8"/>
-                </a:solidFill>
-                <a:latin typeface="Montserrat"/>
-              </a:rPr>
-              <a:t>Персональную подборку подрядчиков</a:t>
-            </a:r>
-          </a:p>
-        </p:txBody>
-      </p:sp>
-      <p:sp>
-        <p:nvSpPr>
-          <p:cNvPr id="12" name="Rectangle 11"/>
+          <p:cNvPr id="10" name="Rectangle 9"/>
           <p:cNvSpPr/>
           <p:nvPr/>
         </p:nvSpPr>
         <p:spPr>
           <a:xfrm>
-            <a:off x="6172200" y="2679192"/>
-            <a:ext cx="128016" cy="128016"/>
+            <a:off x="886968" y="2487168"/>
+            <a:ext cx="73152" cy="73152"/>
           </a:xfrm>
           <a:prstGeom prst="rect">
             <a:avLst/>
@@ -4761,24 +4431,60 @@
       </p:sp>
       <p:sp>
         <p:nvSpPr>
-          <p:cNvPr id="13" name="Rectangle 12"/>
+          <p:cNvPr id="11" name="TextBox 10"/>
+          <p:cNvSpPr txBox="1"/>
+          <p:nvPr/>
+        </p:nvSpPr>
+        <p:spPr>
+          <a:xfrm>
+            <a:off x="886968" y="2670048"/>
+            <a:ext cx="2980944" cy="1069848"/>
+          </a:xfrm>
+          <a:prstGeom prst="rect">
+            <a:avLst/>
+          </a:prstGeom>
+          <a:noFill/>
+        </p:spPr>
+        <p:txBody>
+          <a:bodyPr wrap="square">
+            <a:spAutoFit/>
+          </a:bodyPr>
+          <a:lstStyle/>
+          <a:p>
+            <a:pPr algn="l"/>
+            <a:r>
+              <a:rPr sz="1800" b="1">
+                <a:solidFill>
+                  <a:srgbClr val="EEF1F8"/>
+                </a:solidFill>
+                <a:latin typeface="Space Grotesk"/>
+              </a:rPr>
+              <a:t>Подборку
+подрядчиков</a:t>
+            </a:r>
+          </a:p>
+        </p:txBody>
+      </p:sp>
+      <p:sp>
+        <p:nvSpPr>
+          <p:cNvPr id="12" name="Rectangle 11"/>
           <p:cNvSpPr/>
           <p:nvPr/>
         </p:nvSpPr>
         <p:spPr>
           <a:xfrm>
-            <a:off x="6400800" y="2148840"/>
-            <a:ext cx="5212080" cy="1188720"/>
+            <a:off x="4251960" y="2286000"/>
+            <a:ext cx="3383280" cy="1572768"/>
           </a:xfrm>
           <a:prstGeom prst="rect">
             <a:avLst/>
           </a:prstGeom>
           <a:solidFill>
-            <a:srgbClr val="0D1527"/>
+            <a:srgbClr val="0A0F1C"/>
           </a:solidFill>
-          <a:ln w="6350">
+          <a:ln w="9525">
             <a:solidFill>
-              <a:srgbClr val="222D40"/>
+              <a:srgbClr val="1A284D"/>
             </a:solidFill>
           </a:ln>
         </p:spPr>
@@ -4806,48 +4512,14 @@
       </p:sp>
       <p:sp>
         <p:nvSpPr>
-          <p:cNvPr id="14" name="TextBox 13"/>
-          <p:cNvSpPr txBox="1"/>
-          <p:nvPr/>
-        </p:nvSpPr>
-        <p:spPr>
-          <a:xfrm>
-            <a:off x="6537960" y="2404872"/>
-            <a:ext cx="4937760" cy="868680"/>
-          </a:xfrm>
-          <a:prstGeom prst="rect">
-            <a:avLst/>
-          </a:prstGeom>
-          <a:noFill/>
-        </p:spPr>
-        <p:txBody>
-          <a:bodyPr wrap="square">
-            <a:spAutoFit/>
-          </a:bodyPr>
-          <a:lstStyle/>
-          <a:p>
-            <a:r>
-              <a:rPr sz="1700" b="1">
-                <a:solidFill>
-                  <a:srgbClr val="EEF1F8"/>
-                </a:solidFill>
-                <a:latin typeface="Montserrat"/>
-              </a:rPr>
-              <a:t>Предварительную смету</a:t>
-            </a:r>
-          </a:p>
-        </p:txBody>
-      </p:sp>
-      <p:sp>
-        <p:nvSpPr>
-          <p:cNvPr id="15" name="Rectangle 14"/>
+          <p:cNvPr id="13" name="Rectangle 12"/>
           <p:cNvSpPr/>
           <p:nvPr/>
         </p:nvSpPr>
         <p:spPr>
           <a:xfrm>
-            <a:off x="502920" y="4032504"/>
-            <a:ext cx="128016" cy="128016"/>
+            <a:off x="4453128" y="2487168"/>
+            <a:ext cx="73152" cy="73152"/>
           </a:xfrm>
           <a:prstGeom prst="rect">
             <a:avLst/>
@@ -4883,24 +4555,59 @@
       </p:sp>
       <p:sp>
         <p:nvSpPr>
-          <p:cNvPr id="16" name="Rectangle 15"/>
+          <p:cNvPr id="14" name="TextBox 13"/>
+          <p:cNvSpPr txBox="1"/>
+          <p:nvPr/>
+        </p:nvSpPr>
+        <p:spPr>
+          <a:xfrm>
+            <a:off x="4453128" y="2670048"/>
+            <a:ext cx="2980944" cy="1069848"/>
+          </a:xfrm>
+          <a:prstGeom prst="rect">
+            <a:avLst/>
+          </a:prstGeom>
+          <a:noFill/>
+        </p:spPr>
+        <p:txBody>
+          <a:bodyPr wrap="square">
+            <a:spAutoFit/>
+          </a:bodyPr>
+          <a:lstStyle/>
+          <a:p>
+            <a:pPr algn="l"/>
+            <a:r>
+              <a:rPr sz="1800" b="1">
+                <a:solidFill>
+                  <a:srgbClr val="EEF1F8"/>
+                </a:solidFill>
+                <a:latin typeface="Space Grotesk"/>
+              </a:rPr>
+              <a:t>Смету</a:t>
+            </a:r>
+          </a:p>
+        </p:txBody>
+      </p:sp>
+      <p:sp>
+        <p:nvSpPr>
+          <p:cNvPr id="15" name="Rectangle 14"/>
           <p:cNvSpPr/>
           <p:nvPr/>
         </p:nvSpPr>
         <p:spPr>
           <a:xfrm>
-            <a:off x="731520" y="3502152"/>
-            <a:ext cx="5212080" cy="1188720"/>
+            <a:off x="7818120" y="2286000"/>
+            <a:ext cx="3383280" cy="1572768"/>
           </a:xfrm>
           <a:prstGeom prst="rect">
             <a:avLst/>
           </a:prstGeom>
           <a:solidFill>
-            <a:srgbClr val="0D1527"/>
+            <a:srgbClr val="0A0F1C"/>
           </a:solidFill>
-          <a:ln w="6350">
+          <a:ln w="9525">
             <a:solidFill>
-              <a:srgbClr val="222D40"/>
+              <a:srgbClr val="1A284D"/>
             </a:solidFill>
           </a:ln>
         </p:spPr>
@@ -4928,48 +4635,14 @@
       </p:sp>
       <p:sp>
         <p:nvSpPr>
-          <p:cNvPr id="17" name="TextBox 16"/>
-          <p:cNvSpPr txBox="1"/>
-          <p:nvPr/>
-        </p:nvSpPr>
-        <p:spPr>
-          <a:xfrm>
-            <a:off x="868680" y="3758184"/>
-            <a:ext cx="4937760" cy="868680"/>
-          </a:xfrm>
-          <a:prstGeom prst="rect">
-            <a:avLst/>
-          </a:prstGeom>
-          <a:noFill/>
-        </p:spPr>
-        <p:txBody>
-          <a:bodyPr wrap="square">
-            <a:spAutoFit/>
-          </a:bodyPr>
-          <a:lstStyle/>
-          <a:p>
-            <a:r>
-              <a:rPr sz="1700" b="1">
-                <a:solidFill>
-                  <a:srgbClr val="EEF1F8"/>
-                </a:solidFill>
-                <a:latin typeface="Montserrat"/>
-              </a:rPr>
-              <a:t>Сценарий мероприятия</a:t>
-            </a:r>
-          </a:p>
-        </p:txBody>
-      </p:sp>
-      <p:sp>
-        <p:nvSpPr>
-          <p:cNvPr id="18" name="Rectangle 17"/>
+          <p:cNvPr id="16" name="Rectangle 15"/>
           <p:cNvSpPr/>
           <p:nvPr/>
         </p:nvSpPr>
         <p:spPr>
           <a:xfrm>
-            <a:off x="6172200" y="4032504"/>
-            <a:ext cx="128016" cy="128016"/>
+            <a:off x="8019288" y="2487168"/>
+            <a:ext cx="73152" cy="73152"/>
           </a:xfrm>
           <a:prstGeom prst="rect">
             <a:avLst/>
@@ -5005,24 +4678,59 @@
       </p:sp>
       <p:sp>
         <p:nvSpPr>
-          <p:cNvPr id="19" name="Rectangle 18"/>
+          <p:cNvPr id="17" name="TextBox 16"/>
+          <p:cNvSpPr txBox="1"/>
+          <p:nvPr/>
+        </p:nvSpPr>
+        <p:spPr>
+          <a:xfrm>
+            <a:off x="8019288" y="2670048"/>
+            <a:ext cx="2980944" cy="1069848"/>
+          </a:xfrm>
+          <a:prstGeom prst="rect">
+            <a:avLst/>
+          </a:prstGeom>
+          <a:noFill/>
+        </p:spPr>
+        <p:txBody>
+          <a:bodyPr wrap="square">
+            <a:spAutoFit/>
+          </a:bodyPr>
+          <a:lstStyle/>
+          <a:p>
+            <a:pPr algn="l"/>
+            <a:r>
+              <a:rPr sz="1800" b="1">
+                <a:solidFill>
+                  <a:srgbClr val="EEF1F8"/>
+                </a:solidFill>
+                <a:latin typeface="Space Grotesk"/>
+              </a:rPr>
+              <a:t>Сценарий</a:t>
+            </a:r>
+          </a:p>
+        </p:txBody>
+      </p:sp>
+      <p:sp>
+        <p:nvSpPr>
+          <p:cNvPr id="18" name="Rectangle 17"/>
           <p:cNvSpPr/>
           <p:nvPr/>
         </p:nvSpPr>
         <p:spPr>
           <a:xfrm>
-            <a:off x="6400800" y="3502152"/>
-            <a:ext cx="5212080" cy="1188720"/>
+            <a:off x="685800" y="4041648"/>
+            <a:ext cx="3383280" cy="1572768"/>
           </a:xfrm>
           <a:prstGeom prst="rect">
             <a:avLst/>
           </a:prstGeom>
           <a:solidFill>
-            <a:srgbClr val="0D1527"/>
+            <a:srgbClr val="0A0F1C"/>
           </a:solidFill>
-          <a:ln w="6350">
+          <a:ln w="9525">
             <a:solidFill>
-              <a:srgbClr val="222D40"/>
+              <a:srgbClr val="1A284D"/>
             </a:solidFill>
           </a:ln>
         </p:spPr>
@@ -5050,48 +4758,14 @@
       </p:sp>
       <p:sp>
         <p:nvSpPr>
-          <p:cNvPr id="20" name="TextBox 19"/>
-          <p:cNvSpPr txBox="1"/>
-          <p:nvPr/>
-        </p:nvSpPr>
-        <p:spPr>
-          <a:xfrm>
-            <a:off x="6537960" y="3758184"/>
-            <a:ext cx="4937760" cy="868680"/>
-          </a:xfrm>
-          <a:prstGeom prst="rect">
-            <a:avLst/>
-          </a:prstGeom>
-          <a:noFill/>
-        </p:spPr>
-        <p:txBody>
-          <a:bodyPr wrap="square">
-            <a:spAutoFit/>
-          </a:bodyPr>
-          <a:lstStyle/>
-          <a:p>
-            <a:r>
-              <a:rPr sz="1700" b="1">
-                <a:solidFill>
-                  <a:srgbClr val="EEF1F8"/>
-                </a:solidFill>
-                <a:latin typeface="Montserrat"/>
-              </a:rPr>
-              <a:t>Тайминг</a:t>
-            </a:r>
-          </a:p>
-        </p:txBody>
-      </p:sp>
-      <p:sp>
-        <p:nvSpPr>
-          <p:cNvPr id="21" name="Rectangle 20"/>
+          <p:cNvPr id="19" name="Rectangle 18"/>
           <p:cNvSpPr/>
           <p:nvPr/>
         </p:nvSpPr>
         <p:spPr>
           <a:xfrm>
-            <a:off x="502920" y="5385816"/>
-            <a:ext cx="128016" cy="128016"/>
+            <a:off x="886968" y="4242816"/>
+            <a:ext cx="73152" cy="73152"/>
           </a:xfrm>
           <a:prstGeom prst="rect">
             <a:avLst/>
@@ -5127,24 +4801,59 @@
       </p:sp>
       <p:sp>
         <p:nvSpPr>
-          <p:cNvPr id="22" name="Rectangle 21"/>
+          <p:cNvPr id="20" name="TextBox 19"/>
+          <p:cNvSpPr txBox="1"/>
+          <p:nvPr/>
+        </p:nvSpPr>
+        <p:spPr>
+          <a:xfrm>
+            <a:off x="886968" y="4425696"/>
+            <a:ext cx="2980944" cy="1069848"/>
+          </a:xfrm>
+          <a:prstGeom prst="rect">
+            <a:avLst/>
+          </a:prstGeom>
+          <a:noFill/>
+        </p:spPr>
+        <p:txBody>
+          <a:bodyPr wrap="square">
+            <a:spAutoFit/>
+          </a:bodyPr>
+          <a:lstStyle/>
+          <a:p>
+            <a:pPr algn="l"/>
+            <a:r>
+              <a:rPr sz="1800" b="1">
+                <a:solidFill>
+                  <a:srgbClr val="EEF1F8"/>
+                </a:solidFill>
+                <a:latin typeface="Space Grotesk"/>
+              </a:rPr>
+              <a:t>Тайминг</a:t>
+            </a:r>
+          </a:p>
+        </p:txBody>
+      </p:sp>
+      <p:sp>
+        <p:nvSpPr>
+          <p:cNvPr id="21" name="Rectangle 20"/>
           <p:cNvSpPr/>
           <p:nvPr/>
         </p:nvSpPr>
         <p:spPr>
           <a:xfrm>
-            <a:off x="731520" y="4855464"/>
-            <a:ext cx="5212080" cy="1188720"/>
+            <a:off x="4251960" y="4041648"/>
+            <a:ext cx="3383280" cy="1572768"/>
           </a:xfrm>
           <a:prstGeom prst="rect">
             <a:avLst/>
           </a:prstGeom>
           <a:solidFill>
-            <a:srgbClr val="0D1527"/>
+            <a:srgbClr val="0A0F1C"/>
           </a:solidFill>
-          <a:ln w="6350">
+          <a:ln w="9525">
             <a:solidFill>
-              <a:srgbClr val="222D40"/>
+              <a:srgbClr val="1A284D"/>
             </a:solidFill>
           </a:ln>
         </p:spPr>
@@ -5172,48 +4881,14 @@
       </p:sp>
       <p:sp>
         <p:nvSpPr>
-          <p:cNvPr id="23" name="TextBox 22"/>
-          <p:cNvSpPr txBox="1"/>
-          <p:nvPr/>
-        </p:nvSpPr>
-        <p:spPr>
-          <a:xfrm>
-            <a:off x="868680" y="5111496"/>
-            <a:ext cx="4937760" cy="868680"/>
-          </a:xfrm>
-          <a:prstGeom prst="rect">
-            <a:avLst/>
-          </a:prstGeom>
-          <a:noFill/>
-        </p:spPr>
-        <p:txBody>
-          <a:bodyPr wrap="square">
-            <a:spAutoFit/>
-          </a:bodyPr>
-          <a:lstStyle/>
-          <a:p>
-            <a:r>
-              <a:rPr sz="1700" b="1">
-                <a:solidFill>
-                  <a:srgbClr val="EEF1F8"/>
-                </a:solidFill>
-                <a:latin typeface="Montserrat"/>
-              </a:rPr>
-              <a:t>Пригласительные</a:t>
-            </a:r>
-          </a:p>
-        </p:txBody>
-      </p:sp>
-      <p:sp>
-        <p:nvSpPr>
-          <p:cNvPr id="24" name="Rectangle 23"/>
+          <p:cNvPr id="22" name="Rectangle 21"/>
           <p:cNvSpPr/>
           <p:nvPr/>
         </p:nvSpPr>
         <p:spPr>
           <a:xfrm>
-            <a:off x="6172200" y="5385816"/>
-            <a:ext cx="128016" cy="128016"/>
+            <a:off x="4453128" y="4242816"/>
+            <a:ext cx="73152" cy="73152"/>
           </a:xfrm>
           <a:prstGeom prst="rect">
             <a:avLst/>
@@ -5249,24 +4924,59 @@
       </p:sp>
       <p:sp>
         <p:nvSpPr>
-          <p:cNvPr id="25" name="Rectangle 24"/>
+          <p:cNvPr id="23" name="TextBox 22"/>
+          <p:cNvSpPr txBox="1"/>
+          <p:nvPr/>
+        </p:nvSpPr>
+        <p:spPr>
+          <a:xfrm>
+            <a:off x="4453128" y="4425696"/>
+            <a:ext cx="2980944" cy="1069848"/>
+          </a:xfrm>
+          <a:prstGeom prst="rect">
+            <a:avLst/>
+          </a:prstGeom>
+          <a:noFill/>
+        </p:spPr>
+        <p:txBody>
+          <a:bodyPr wrap="square">
+            <a:spAutoFit/>
+          </a:bodyPr>
+          <a:lstStyle/>
+          <a:p>
+            <a:pPr algn="l"/>
+            <a:r>
+              <a:rPr sz="1800" b="1">
+                <a:solidFill>
+                  <a:srgbClr val="EEF1F8"/>
+                </a:solidFill>
+                <a:latin typeface="Space Grotesk"/>
+              </a:rPr>
+              <a:t>Пригласительные</a:t>
+            </a:r>
+          </a:p>
+        </p:txBody>
+      </p:sp>
+      <p:sp>
+        <p:nvSpPr>
+          <p:cNvPr id="24" name="Rectangle 23"/>
           <p:cNvSpPr/>
           <p:nvPr/>
         </p:nvSpPr>
         <p:spPr>
           <a:xfrm>
-            <a:off x="6400800" y="4855464"/>
-            <a:ext cx="5212080" cy="1188720"/>
+            <a:off x="7818120" y="4041648"/>
+            <a:ext cx="3383280" cy="1572768"/>
           </a:xfrm>
           <a:prstGeom prst="rect">
             <a:avLst/>
           </a:prstGeom>
           <a:solidFill>
-            <a:srgbClr val="0D1527"/>
+            <a:srgbClr val="0A0F1C"/>
           </a:solidFill>
-          <a:ln w="6350">
+          <a:ln w="9525">
             <a:solidFill>
-              <a:srgbClr val="222D40"/>
+              <a:srgbClr val="1A284D"/>
             </a:solidFill>
           </a:ln>
         </p:spPr>
@@ -5294,14 +5004,57 @@
       </p:sp>
       <p:sp>
         <p:nvSpPr>
+          <p:cNvPr id="25" name="Rectangle 24"/>
+          <p:cNvSpPr/>
+          <p:nvPr/>
+        </p:nvSpPr>
+        <p:spPr>
+          <a:xfrm>
+            <a:off x="8019288" y="4242816"/>
+            <a:ext cx="73152" cy="73152"/>
+          </a:xfrm>
+          <a:prstGeom prst="rect">
+            <a:avLst/>
+          </a:prstGeom>
+          <a:solidFill>
+            <a:srgbClr val="2C7BFF"/>
+          </a:solidFill>
+          <a:ln>
+            <a:noFill/>
+          </a:ln>
+        </p:spPr>
+        <p:style>
+          <a:lnRef idx="1">
+            <a:schemeClr val="accent1"/>
+          </a:lnRef>
+          <a:fillRef idx="3">
+            <a:schemeClr val="accent1"/>
+          </a:fillRef>
+          <a:effectRef idx="2">
+            <a:schemeClr val="accent1"/>
+          </a:effectRef>
+          <a:fontRef idx="minor">
+            <a:schemeClr val="lt1"/>
+          </a:fontRef>
+        </p:style>
+        <p:txBody>
+          <a:bodyPr rtlCol="0" anchor="ctr"/>
+          <a:lstStyle/>
+          <a:p>
+            <a:pPr algn="ctr"/>
+          </a:p>
+        </p:txBody>
+      </p:sp>
+      <p:sp>
+        <p:nvSpPr>
           <p:cNvPr id="26" name="TextBox 25"/>
           <p:cNvSpPr txBox="1"/>
           <p:nvPr/>
         </p:nvSpPr>
         <p:spPr>
           <a:xfrm>
-            <a:off x="6537960" y="5111496"/>
-            <a:ext cx="4937760" cy="868680"/>
+            <a:off x="8019288" y="4425696"/>
+            <a:ext cx="2980944" cy="1069848"/>
           </a:xfrm>
           <a:prstGeom prst="rect">
             <a:avLst/>
@@ -5314,12 +5067,13 @@
           </a:bodyPr>
           <a:lstStyle/>
           <a:p>
-            <a:r>
-              <a:rPr sz="1700" b="1">
+            <a:pPr algn="l"/>
+            <a:r>
+              <a:rPr sz="1800" b="1">
                 <a:solidFill>
                   <a:srgbClr val="EEF1F8"/>
                 </a:solidFill>
-                <a:latin typeface="Montserrat"/>
+                <a:latin typeface="Space Grotesk"/>
               </a:rPr>
               <a:t>Бронирование</a:t>
             </a:r>
@@ -5344,95 +5098,9 @@
         <p:nvPr/>
       </p:nvGrpSpPr>
       <p:grpSpPr/>
-      <p:sp>
-        <p:nvSpPr>
-          <p:cNvPr id="2" name="Rectangle 1"/>
-          <p:cNvSpPr/>
-          <p:nvPr/>
-        </p:nvSpPr>
-        <p:spPr>
-          <a:xfrm>
-            <a:off x="0" y="0"/>
-            <a:ext cx="12191695" cy="6858000"/>
-          </a:xfrm>
-          <a:prstGeom prst="rect">
-            <a:avLst/>
-          </a:prstGeom>
-          <a:solidFill>
-            <a:srgbClr val="04060B"/>
-          </a:solidFill>
-          <a:ln>
-            <a:noFill/>
-          </a:ln>
-        </p:spPr>
-        <p:style>
-          <a:lnRef idx="1">
-            <a:schemeClr val="accent1"/>
-          </a:lnRef>
-          <a:fillRef idx="3">
-            <a:schemeClr val="accent1"/>
-          </a:fillRef>
-          <a:effectRef idx="2">
-            <a:schemeClr val="accent1"/>
-          </a:effectRef>
-          <a:fontRef idx="minor">
-            <a:schemeClr val="lt1"/>
-          </a:fontRef>
-        </p:style>
-        <p:txBody>
-          <a:bodyPr rtlCol="0" anchor="ctr"/>
-          <a:lstStyle/>
-          <a:p>
-            <a:pPr algn="ctr"/>
-          </a:p>
-        </p:txBody>
-      </p:sp>
-      <p:sp>
-        <p:nvSpPr>
-          <p:cNvPr id="3" name="Rectangle 2"/>
-          <p:cNvSpPr/>
-          <p:nvPr/>
-        </p:nvSpPr>
-        <p:spPr>
-          <a:xfrm>
-            <a:off x="6858000" y="0"/>
-            <a:ext cx="5333695" cy="3200400"/>
-          </a:xfrm>
-          <a:prstGeom prst="rect">
-            <a:avLst/>
-          </a:prstGeom>
-          <a:solidFill>
-            <a:srgbClr val="0A1124"/>
-          </a:solidFill>
-          <a:ln>
-            <a:noFill/>
-          </a:ln>
-        </p:spPr>
-        <p:style>
-          <a:lnRef idx="1">
-            <a:schemeClr val="accent1"/>
-          </a:lnRef>
-          <a:fillRef idx="3">
-            <a:schemeClr val="accent1"/>
-          </a:fillRef>
-          <a:effectRef idx="2">
-            <a:schemeClr val="accent1"/>
-          </a:effectRef>
-          <a:fontRef idx="minor">
-            <a:schemeClr val="lt1"/>
-          </a:fontRef>
-        </p:style>
-        <p:txBody>
-          <a:bodyPr rtlCol="0" anchor="ctr"/>
-          <a:lstStyle/>
-          <a:p>
-            <a:pPr algn="ctr"/>
-          </a:p>
-        </p:txBody>
-      </p:sp>
       <p:pic>
         <p:nvPicPr>
-          <p:cNvPr id="4" name="Picture 3" descr="logo-dark.png"/>
+          <p:cNvPr id="2" name="Picture 1" descr="bg-content__1920x1080.png"/>
           <p:cNvPicPr>
             <a:picLocks noChangeAspect="1"/>
           </p:cNvPicPr>
@@ -5446,24 +5114,48 @@
         </p:blipFill>
         <p:spPr>
           <a:xfrm>
-            <a:off x="11098987" y="182880"/>
-            <a:ext cx="864108" cy="256031"/>
+            <a:off x="0" y="0"/>
+            <a:ext cx="12191695" cy="6858000"/>
           </a:xfrm>
           <a:prstGeom prst="rect">
             <a:avLst/>
           </a:prstGeom>
         </p:spPr>
       </p:pic>
-      <p:sp>
-        <p:nvSpPr>
-          <p:cNvPr id="5" name="TextBox 4"/>
+      <p:pic>
+        <p:nvPicPr>
+          <p:cNvPr id="3" name="Picture 2" descr="logo-dark.png"/>
+          <p:cNvPicPr>
+            <a:picLocks noChangeAspect="1"/>
+          </p:cNvPicPr>
+          <p:nvPr/>
+        </p:nvPicPr>
+        <p:blipFill>
+          <a:blip r:embed="rId3"/>
+          <a:stretch>
+            <a:fillRect/>
+          </a:stretch>
+        </p:blipFill>
+        <p:spPr>
+          <a:xfrm>
+            <a:off x="594360" y="201168"/>
+            <a:ext cx="1227242" cy="347472"/>
+          </a:xfrm>
+          <a:prstGeom prst="rect">
+            <a:avLst/>
+          </a:prstGeom>
+        </p:spPr>
+      </p:pic>
+      <p:sp>
+        <p:nvSpPr>
+          <p:cNvPr id="4" name="TextBox 3"/>
           <p:cNvSpPr txBox="1"/>
           <p:nvPr/>
         </p:nvSpPr>
         <p:spPr>
           <a:xfrm>
-            <a:off x="502920" y="228600"/>
-            <a:ext cx="5486400" cy="320040"/>
+            <a:off x="11185855" y="502920"/>
+            <a:ext cx="731520" cy="365760"/>
           </a:xfrm>
           <a:prstGeom prst="rect">
             <a:avLst/>
@@ -5476,29 +5168,29 @@
           </a:bodyPr>
           <a:lstStyle/>
           <a:p>
-            <a:pPr algn="l"/>
-            <a:r>
-              <a:rPr sz="1100" b="1" i="0">
-                <a:solidFill>
-                  <a:srgbClr val="2C7BFF"/>
-                </a:solidFill>
-                <a:latin typeface="Arial"/>
+            <a:pPr algn="r"/>
+            <a:r>
+              <a:rPr sz="1100" b="0">
+                <a:solidFill>
+                  <a:srgbClr val="9AA4B6"/>
+                </a:solidFill>
+                <a:latin typeface="JetBrains Mono"/>
               </a:rPr>
-              <a:t>КАК ЭТО РАБОТАЕТ</a:t>
-            </a:r>
-          </a:p>
-        </p:txBody>
-      </p:sp>
-      <p:sp>
-        <p:nvSpPr>
-          <p:cNvPr id="6" name="TextBox 5"/>
+              <a:t>03</a:t>
+            </a:r>
+          </a:p>
+        </p:txBody>
+      </p:sp>
+      <p:sp>
+        <p:nvSpPr>
+          <p:cNvPr id="5" name="TextBox 4"/>
           <p:cNvSpPr txBox="1"/>
           <p:nvPr/>
         </p:nvSpPr>
         <p:spPr>
           <a:xfrm>
-            <a:off x="502920" y="502920"/>
-            <a:ext cx="9144000" cy="914400"/>
+            <a:off x="685800" y="502920"/>
+            <a:ext cx="10820095" cy="320040"/>
           </a:xfrm>
           <a:prstGeom prst="rect">
             <a:avLst/>
@@ -5513,14 +5205,48 @@
           <a:p>
             <a:pPr algn="l"/>
             <a:r>
-              <a:rPr sz="3600" b="1" i="0">
+              <a:rPr sz="1100" b="0">
+                <a:solidFill>
+                  <a:srgbClr val="5AA0FF"/>
+                </a:solidFill>
+                <a:latin typeface="JetBrains Mono"/>
+              </a:rPr>
+              <a:t>КАК ЭТО РАБОТАЕТ</a:t>
+            </a:r>
+          </a:p>
+        </p:txBody>
+      </p:sp>
+      <p:sp>
+        <p:nvSpPr>
+          <p:cNvPr id="6" name="TextBox 5"/>
+          <p:cNvSpPr txBox="1"/>
+          <p:nvPr/>
+        </p:nvSpPr>
+        <p:spPr>
+          <a:xfrm>
+            <a:off x="685800" y="868680"/>
+            <a:ext cx="10820095" cy="822960"/>
+          </a:xfrm>
+          <a:prstGeom prst="rect">
+            <a:avLst/>
+          </a:prstGeom>
+          <a:noFill/>
+        </p:spPr>
+        <p:txBody>
+          <a:bodyPr wrap="square">
+            <a:spAutoFit/>
+          </a:bodyPr>
+          <a:lstStyle/>
+          <a:p>
+            <a:pPr algn="l"/>
+            <a:r>
+              <a:rPr sz="3800" b="1">
                 <a:solidFill>
                   <a:srgbClr val="EEF1F8"/>
                 </a:solidFill>
-                <a:latin typeface="Montserrat"/>
+                <a:latin typeface="Space Grotesk"/>
               </a:rPr>
-              <a:t>От идеи до бронирования —
-в одном приложении</a:t>
+              <a:t>От идеи до брони — в одном приложении</a:t>
             </a:r>
           </a:p>
         </p:txBody>
@@ -5533,96 +5259,8 @@
         </p:nvSpPr>
         <p:spPr>
           <a:xfrm>
-            <a:off x="502920" y="1508760"/>
-            <a:ext cx="11155680" cy="18288"/>
-          </a:xfrm>
-          <a:prstGeom prst="rect">
-            <a:avLst/>
-          </a:prstGeom>
-          <a:solidFill>
-            <a:srgbClr val="222D40"/>
-          </a:solidFill>
-          <a:ln>
-            <a:noFill/>
-          </a:ln>
-        </p:spPr>
-        <p:style>
-          <a:lnRef idx="1">
-            <a:schemeClr val="accent1"/>
-          </a:lnRef>
-          <a:fillRef idx="3">
-            <a:schemeClr val="accent1"/>
-          </a:fillRef>
-          <a:effectRef idx="2">
-            <a:schemeClr val="accent1"/>
-          </a:effectRef>
-          <a:fontRef idx="minor">
-            <a:schemeClr val="lt1"/>
-          </a:fontRef>
-        </p:style>
-        <p:txBody>
-          <a:bodyPr rtlCol="0" anchor="ctr"/>
-          <a:lstStyle/>
-          <a:p>
-            <a:pPr algn="ctr"/>
-          </a:p>
-        </p:txBody>
-      </p:sp>
-      <p:sp>
-        <p:nvSpPr>
-          <p:cNvPr id="8" name="Rectangle 7"/>
-          <p:cNvSpPr/>
-          <p:nvPr/>
-        </p:nvSpPr>
-        <p:spPr>
-          <a:xfrm>
-            <a:off x="502920" y="1737360"/>
-            <a:ext cx="1965960" cy="3200400"/>
-          </a:xfrm>
-          <a:prstGeom prst="rect">
-            <a:avLst/>
-          </a:prstGeom>
-          <a:solidFill>
-            <a:srgbClr val="0D1527"/>
-          </a:solidFill>
-          <a:ln w="6350">
-            <a:solidFill>
-              <a:srgbClr val="222D40"/>
-            </a:solidFill>
-          </a:ln>
-        </p:spPr>
-        <p:style>
-          <a:lnRef idx="1">
-            <a:schemeClr val="accent1"/>
-          </a:lnRef>
-          <a:fillRef idx="3">
-            <a:schemeClr val="accent1"/>
-          </a:fillRef>
-          <a:effectRef idx="2">
-            <a:schemeClr val="accent1"/>
-          </a:effectRef>
-          <a:fontRef idx="minor">
-            <a:schemeClr val="lt1"/>
-          </a:fontRef>
-        </p:style>
-        <p:txBody>
-          <a:bodyPr rtlCol="0" anchor="ctr"/>
-          <a:lstStyle/>
-          <a:p>
-            <a:pPr algn="ctr"/>
-          </a:p>
-        </p:txBody>
-      </p:sp>
-      <p:sp>
-        <p:nvSpPr>
-          <p:cNvPr id="9" name="Rectangle 8"/>
-          <p:cNvSpPr/>
-          <p:nvPr/>
-        </p:nvSpPr>
-        <p:spPr>
-          <a:xfrm>
-            <a:off x="1193292" y="1938528"/>
-            <a:ext cx="585216" cy="585216"/>
+            <a:off x="685800" y="1828800"/>
+            <a:ext cx="640080" cy="12700"/>
           </a:xfrm>
           <a:prstGeom prst="rect">
             <a:avLst/>
@@ -5658,129 +5296,24 @@
       </p:sp>
       <p:sp>
         <p:nvSpPr>
-          <p:cNvPr id="10" name="TextBox 9"/>
-          <p:cNvSpPr txBox="1"/>
-          <p:nvPr/>
-        </p:nvSpPr>
-        <p:spPr>
-          <a:xfrm>
-            <a:off x="1193292" y="1938528"/>
-            <a:ext cx="585216" cy="585216"/>
-          </a:xfrm>
-          <a:prstGeom prst="rect">
-            <a:avLst/>
-          </a:prstGeom>
-          <a:noFill/>
-        </p:spPr>
-        <p:txBody>
-          <a:bodyPr wrap="none">
-            <a:spAutoFit/>
-          </a:bodyPr>
-          <a:lstStyle/>
-          <a:p>
-            <a:pPr algn="ctr"/>
-            <a:r>
-              <a:rPr sz="2000" b="1">
-                <a:solidFill>
-                  <a:srgbClr val="FFFFFF"/>
-                </a:solidFill>
-                <a:latin typeface="Arial"/>
-              </a:rPr>
-              <a:t>1</a:t>
-            </a:r>
-          </a:p>
-        </p:txBody>
-      </p:sp>
-      <p:sp>
-        <p:nvSpPr>
-          <p:cNvPr id="11" name="TextBox 10"/>
-          <p:cNvSpPr txBox="1"/>
-          <p:nvPr/>
-        </p:nvSpPr>
-        <p:spPr>
-          <a:xfrm>
-            <a:off x="667512" y="2697480"/>
-            <a:ext cx="1636776" cy="2103120"/>
-          </a:xfrm>
-          <a:prstGeom prst="rect">
-            <a:avLst/>
-          </a:prstGeom>
-          <a:noFill/>
-        </p:spPr>
-        <p:txBody>
-          <a:bodyPr wrap="square">
-            <a:spAutoFit/>
-          </a:bodyPr>
-          <a:lstStyle/>
-          <a:p>
-            <a:pPr algn="ctr"/>
-            <a:r>
-              <a:rPr sz="1400">
-                <a:solidFill>
-                  <a:srgbClr val="EEF1F8"/>
-                </a:solidFill>
-                <a:latin typeface="Montserrat"/>
-              </a:rPr>
-              <a:t>Пользователь выбирает тип мероприятия</a:t>
-            </a:r>
-          </a:p>
-        </p:txBody>
-      </p:sp>
-      <p:sp>
-        <p:nvSpPr>
-          <p:cNvPr id="12" name="TextBox 11"/>
-          <p:cNvSpPr txBox="1"/>
-          <p:nvPr/>
-        </p:nvSpPr>
-        <p:spPr>
-          <a:xfrm>
-            <a:off x="2514600" y="3154679"/>
-            <a:ext cx="201168" cy="365760"/>
-          </a:xfrm>
-          <a:prstGeom prst="rect">
-            <a:avLst/>
-          </a:prstGeom>
-          <a:noFill/>
-        </p:spPr>
-        <p:txBody>
-          <a:bodyPr wrap="none">
-            <a:spAutoFit/>
-          </a:bodyPr>
-          <a:lstStyle/>
-          <a:p>
-            <a:pPr algn="ctr"/>
-            <a:r>
-              <a:rPr sz="1800" b="1">
-                <a:solidFill>
-                  <a:srgbClr val="2C7BFF"/>
-                </a:solidFill>
-                <a:latin typeface="Arial"/>
-              </a:rPr>
-              <a:t>&gt;</a:t>
-            </a:r>
-          </a:p>
-        </p:txBody>
-      </p:sp>
-      <p:sp>
-        <p:nvSpPr>
-          <p:cNvPr id="13" name="Rectangle 12"/>
+          <p:cNvPr id="8" name="Rectangle 7"/>
           <p:cNvSpPr/>
           <p:nvPr/>
         </p:nvSpPr>
         <p:spPr>
           <a:xfrm>
-            <a:off x="2743200" y="1737360"/>
-            <a:ext cx="1965960" cy="3200400"/>
+            <a:off x="518010" y="2103120"/>
+            <a:ext cx="2084831" cy="2926080"/>
           </a:xfrm>
           <a:prstGeom prst="rect">
             <a:avLst/>
           </a:prstGeom>
           <a:solidFill>
-            <a:srgbClr val="0D1527"/>
+            <a:srgbClr val="0A0F1C"/>
           </a:solidFill>
-          <a:ln w="6350">
+          <a:ln w="12700">
             <a:solidFill>
-              <a:srgbClr val="222D40"/>
+              <a:srgbClr val="2C7BFF"/>
             </a:solidFill>
           </a:ln>
         </p:spPr>
@@ -5808,16 +5341,16 @@
       </p:sp>
       <p:sp>
         <p:nvSpPr>
-          <p:cNvPr id="14" name="Rectangle 13"/>
+          <p:cNvPr id="9" name="Oval 8"/>
           <p:cNvSpPr/>
           <p:nvPr/>
         </p:nvSpPr>
         <p:spPr>
           <a:xfrm>
-            <a:off x="3433572" y="1938528"/>
+            <a:off x="1267817" y="2404872"/>
             <a:ext cx="585216" cy="585216"/>
           </a:xfrm>
-          <a:prstGeom prst="rect">
+          <a:prstGeom prst="ellipse">
             <a:avLst/>
           </a:prstGeom>
           <a:solidFill>
@@ -5842,58 +5375,32 @@
           </a:fontRef>
         </p:style>
         <p:txBody>
-          <a:bodyPr rtlCol="0" anchor="ctr"/>
+          <a:bodyPr rtlCol="0" anchor="ctr" wrap="none"/>
           <a:lstStyle/>
           <a:p>
             <a:pPr algn="ctr"/>
-          </a:p>
-        </p:txBody>
-      </p:sp>
-      <p:sp>
-        <p:nvSpPr>
-          <p:cNvPr id="15" name="TextBox 14"/>
+            <a:r>
+              <a:rPr sz="1400" b="1">
+                <a:solidFill>
+                  <a:srgbClr val="EEF1F8"/>
+                </a:solidFill>
+                <a:latin typeface="JetBrains Mono"/>
+              </a:rPr>
+              <a:t>1</a:t>
+            </a:r>
+          </a:p>
+        </p:txBody>
+      </p:sp>
+      <p:sp>
+        <p:nvSpPr>
+          <p:cNvPr id="10" name="TextBox 9"/>
           <p:cNvSpPr txBox="1"/>
           <p:nvPr/>
         </p:nvSpPr>
         <p:spPr>
           <a:xfrm>
-            <a:off x="3433572" y="1938528"/>
-            <a:ext cx="585216" cy="585216"/>
-          </a:xfrm>
-          <a:prstGeom prst="rect">
-            <a:avLst/>
-          </a:prstGeom>
-          <a:noFill/>
-        </p:spPr>
-        <p:txBody>
-          <a:bodyPr wrap="none">
-            <a:spAutoFit/>
-          </a:bodyPr>
-          <a:lstStyle/>
-          <a:p>
-            <a:pPr algn="ctr"/>
-            <a:r>
-              <a:rPr sz="2000" b="1">
-                <a:solidFill>
-                  <a:srgbClr val="FFFFFF"/>
-                </a:solidFill>
-                <a:latin typeface="Arial"/>
-              </a:rPr>
-              <a:t>2</a:t>
-            </a:r>
-          </a:p>
-        </p:txBody>
-      </p:sp>
-      <p:sp>
-        <p:nvSpPr>
-          <p:cNvPr id="16" name="TextBox 15"/>
-          <p:cNvSpPr txBox="1"/>
-          <p:nvPr/>
-        </p:nvSpPr>
-        <p:spPr>
-          <a:xfrm>
-            <a:off x="2907792" y="2697480"/>
-            <a:ext cx="1636776" cy="2103120"/>
+            <a:off x="627738" y="3291840"/>
+            <a:ext cx="1865375" cy="1554480"/>
           </a:xfrm>
           <a:prstGeom prst="rect">
             <a:avLst/>
@@ -5908,72 +5415,38 @@
           <a:p>
             <a:pPr algn="ctr"/>
             <a:r>
-              <a:rPr sz="1400">
+              <a:rPr sz="1700" b="1">
                 <a:solidFill>
                   <a:srgbClr val="EEF1F8"/>
                 </a:solidFill>
-                <a:latin typeface="Montserrat"/>
+                <a:latin typeface="Space Grotesk"/>
               </a:rPr>
-              <a:t>AI задаёт уточняющие вопросы</a:t>
-            </a:r>
-          </a:p>
-        </p:txBody>
-      </p:sp>
-      <p:sp>
-        <p:nvSpPr>
-          <p:cNvPr id="17" name="TextBox 16"/>
-          <p:cNvSpPr txBox="1"/>
-          <p:nvPr/>
-        </p:nvSpPr>
-        <p:spPr>
-          <a:xfrm>
-            <a:off x="4754880" y="3154679"/>
-            <a:ext cx="201168" cy="365760"/>
-          </a:xfrm>
-          <a:prstGeom prst="rect">
-            <a:avLst/>
-          </a:prstGeom>
-          <a:noFill/>
-        </p:spPr>
-        <p:txBody>
-          <a:bodyPr wrap="none">
-            <a:spAutoFit/>
-          </a:bodyPr>
-          <a:lstStyle/>
-          <a:p>
-            <a:pPr algn="ctr"/>
-            <a:r>
-              <a:rPr sz="1800" b="1">
-                <a:solidFill>
-                  <a:srgbClr val="2C7BFF"/>
-                </a:solidFill>
-                <a:latin typeface="Arial"/>
-              </a:rPr>
-              <a:t>&gt;</a:t>
-            </a:r>
-          </a:p>
-        </p:txBody>
-      </p:sp>
-      <p:sp>
-        <p:nvSpPr>
-          <p:cNvPr id="18" name="Rectangle 17"/>
+              <a:t>Выбираете тип
+мероприятия</a:t>
+            </a:r>
+          </a:p>
+        </p:txBody>
+      </p:sp>
+      <p:sp>
+        <p:nvSpPr>
+          <p:cNvPr id="11" name="Rectangle 10"/>
           <p:cNvSpPr/>
           <p:nvPr/>
         </p:nvSpPr>
         <p:spPr>
           <a:xfrm>
-            <a:off x="4983479" y="1737360"/>
-            <a:ext cx="1965960" cy="3200400"/>
+            <a:off x="2785721" y="2103120"/>
+            <a:ext cx="2084831" cy="2926080"/>
           </a:xfrm>
           <a:prstGeom prst="rect">
             <a:avLst/>
           </a:prstGeom>
           <a:solidFill>
-            <a:srgbClr val="0D1527"/>
+            <a:srgbClr val="0A0F1C"/>
           </a:solidFill>
-          <a:ln w="6350">
+          <a:ln w="12700">
             <a:solidFill>
-              <a:srgbClr val="222D40"/>
+              <a:srgbClr val="1A284D"/>
             </a:solidFill>
           </a:ln>
         </p:spPr>
@@ -6001,16 +5474,16 @@
       </p:sp>
       <p:sp>
         <p:nvSpPr>
-          <p:cNvPr id="19" name="Rectangle 18"/>
+          <p:cNvPr id="12" name="Oval 11"/>
           <p:cNvSpPr/>
           <p:nvPr/>
         </p:nvSpPr>
         <p:spPr>
           <a:xfrm>
-            <a:off x="5673851" y="1938528"/>
+            <a:off x="3535528" y="2404872"/>
             <a:ext cx="585216" cy="585216"/>
           </a:xfrm>
-          <a:prstGeom prst="rect">
+          <a:prstGeom prst="ellipse">
             <a:avLst/>
           </a:prstGeom>
           <a:solidFill>
@@ -6035,58 +5508,32 @@
           </a:fontRef>
         </p:style>
         <p:txBody>
-          <a:bodyPr rtlCol="0" anchor="ctr"/>
+          <a:bodyPr rtlCol="0" anchor="ctr" wrap="none"/>
           <a:lstStyle/>
           <a:p>
             <a:pPr algn="ctr"/>
-          </a:p>
-        </p:txBody>
-      </p:sp>
-      <p:sp>
-        <p:nvSpPr>
-          <p:cNvPr id="20" name="TextBox 19"/>
+            <a:r>
+              <a:rPr sz="1400" b="1">
+                <a:solidFill>
+                  <a:srgbClr val="EEF1F8"/>
+                </a:solidFill>
+                <a:latin typeface="JetBrains Mono"/>
+              </a:rPr>
+              <a:t>2</a:t>
+            </a:r>
+          </a:p>
+        </p:txBody>
+      </p:sp>
+      <p:sp>
+        <p:nvSpPr>
+          <p:cNvPr id="13" name="TextBox 12"/>
           <p:cNvSpPr txBox="1"/>
           <p:nvPr/>
         </p:nvSpPr>
         <p:spPr>
           <a:xfrm>
-            <a:off x="5673851" y="1938528"/>
-            <a:ext cx="585216" cy="585216"/>
-          </a:xfrm>
-          <a:prstGeom prst="rect">
-            <a:avLst/>
-          </a:prstGeom>
-          <a:noFill/>
-        </p:spPr>
-        <p:txBody>
-          <a:bodyPr wrap="none">
-            <a:spAutoFit/>
-          </a:bodyPr>
-          <a:lstStyle/>
-          <a:p>
-            <a:pPr algn="ctr"/>
-            <a:r>
-              <a:rPr sz="2000" b="1">
-                <a:solidFill>
-                  <a:srgbClr val="FFFFFF"/>
-                </a:solidFill>
-                <a:latin typeface="Arial"/>
-              </a:rPr>
-              <a:t>3</a:t>
-            </a:r>
-          </a:p>
-        </p:txBody>
-      </p:sp>
-      <p:sp>
-        <p:nvSpPr>
-          <p:cNvPr id="21" name="TextBox 20"/>
-          <p:cNvSpPr txBox="1"/>
-          <p:nvPr/>
-        </p:nvSpPr>
-        <p:spPr>
-          <a:xfrm>
-            <a:off x="5148071" y="2697480"/>
-            <a:ext cx="1636776" cy="2103120"/>
+            <a:off x="2895449" y="3291840"/>
+            <a:ext cx="1865375" cy="1554480"/>
           </a:xfrm>
           <a:prstGeom prst="rect">
             <a:avLst/>
@@ -6101,72 +5548,38 @@
           <a:p>
             <a:pPr algn="ctr"/>
             <a:r>
-              <a:rPr sz="1400">
+              <a:rPr sz="1700" b="1">
                 <a:solidFill>
                   <a:srgbClr val="EEF1F8"/>
                 </a:solidFill>
-                <a:latin typeface="Montserrat"/>
+                <a:latin typeface="Space Grotesk"/>
               </a:rPr>
-              <a:t>Система формирует персональную подборку</a:t>
-            </a:r>
-          </a:p>
-        </p:txBody>
-      </p:sp>
-      <p:sp>
-        <p:nvSpPr>
-          <p:cNvPr id="22" name="TextBox 21"/>
-          <p:cNvSpPr txBox="1"/>
-          <p:nvPr/>
-        </p:nvSpPr>
-        <p:spPr>
-          <a:xfrm>
-            <a:off x="6995159" y="3154679"/>
-            <a:ext cx="201168" cy="365760"/>
-          </a:xfrm>
-          <a:prstGeom prst="rect">
-            <a:avLst/>
-          </a:prstGeom>
-          <a:noFill/>
-        </p:spPr>
-        <p:txBody>
-          <a:bodyPr wrap="none">
-            <a:spAutoFit/>
-          </a:bodyPr>
-          <a:lstStyle/>
-          <a:p>
-            <a:pPr algn="ctr"/>
-            <a:r>
-              <a:rPr sz="1800" b="1">
-                <a:solidFill>
-                  <a:srgbClr val="2C7BFF"/>
-                </a:solidFill>
-                <a:latin typeface="Arial"/>
-              </a:rPr>
-              <a:t>&gt;</a:t>
-            </a:r>
-          </a:p>
-        </p:txBody>
-      </p:sp>
-      <p:sp>
-        <p:nvSpPr>
-          <p:cNvPr id="23" name="Rectangle 22"/>
+              <a:t>AI уточняет
+детали</a:t>
+            </a:r>
+          </a:p>
+        </p:txBody>
+      </p:sp>
+      <p:sp>
+        <p:nvSpPr>
+          <p:cNvPr id="14" name="Rectangle 13"/>
           <p:cNvSpPr/>
           <p:nvPr/>
         </p:nvSpPr>
         <p:spPr>
           <a:xfrm>
-            <a:off x="7223759" y="1737360"/>
-            <a:ext cx="1965960" cy="3200400"/>
+            <a:off x="5053432" y="2103120"/>
+            <a:ext cx="2084831" cy="2926080"/>
           </a:xfrm>
           <a:prstGeom prst="rect">
             <a:avLst/>
           </a:prstGeom>
           <a:solidFill>
-            <a:srgbClr val="0D1527"/>
+            <a:srgbClr val="0A0F1C"/>
           </a:solidFill>
-          <a:ln w="6350">
+          <a:ln w="12700">
             <a:solidFill>
-              <a:srgbClr val="222D40"/>
+              <a:srgbClr val="1A284D"/>
             </a:solidFill>
           </a:ln>
         </p:spPr>
@@ -6194,16 +5607,16 @@
       </p:sp>
       <p:sp>
         <p:nvSpPr>
-          <p:cNvPr id="24" name="Rectangle 23"/>
+          <p:cNvPr id="15" name="Oval 14"/>
           <p:cNvSpPr/>
           <p:nvPr/>
         </p:nvSpPr>
         <p:spPr>
           <a:xfrm>
-            <a:off x="7914131" y="1938528"/>
+            <a:off x="5803239" y="2404872"/>
             <a:ext cx="585216" cy="585216"/>
           </a:xfrm>
-          <a:prstGeom prst="rect">
+          <a:prstGeom prst="ellipse">
             <a:avLst/>
           </a:prstGeom>
           <a:solidFill>
@@ -6228,58 +5641,32 @@
           </a:fontRef>
         </p:style>
         <p:txBody>
-          <a:bodyPr rtlCol="0" anchor="ctr"/>
+          <a:bodyPr rtlCol="0" anchor="ctr" wrap="none"/>
           <a:lstStyle/>
           <a:p>
             <a:pPr algn="ctr"/>
-          </a:p>
-        </p:txBody>
-      </p:sp>
-      <p:sp>
-        <p:nvSpPr>
-          <p:cNvPr id="25" name="TextBox 24"/>
+            <a:r>
+              <a:rPr sz="1400" b="1">
+                <a:solidFill>
+                  <a:srgbClr val="EEF1F8"/>
+                </a:solidFill>
+                <a:latin typeface="JetBrains Mono"/>
+              </a:rPr>
+              <a:t>3</a:t>
+            </a:r>
+          </a:p>
+        </p:txBody>
+      </p:sp>
+      <p:sp>
+        <p:nvSpPr>
+          <p:cNvPr id="16" name="TextBox 15"/>
           <p:cNvSpPr txBox="1"/>
           <p:nvPr/>
         </p:nvSpPr>
         <p:spPr>
           <a:xfrm>
-            <a:off x="7914131" y="1938528"/>
-            <a:ext cx="585216" cy="585216"/>
-          </a:xfrm>
-          <a:prstGeom prst="rect">
-            <a:avLst/>
-          </a:prstGeom>
-          <a:noFill/>
-        </p:spPr>
-        <p:txBody>
-          <a:bodyPr wrap="none">
-            <a:spAutoFit/>
-          </a:bodyPr>
-          <a:lstStyle/>
-          <a:p>
-            <a:pPr algn="ctr"/>
-            <a:r>
-              <a:rPr sz="2000" b="1">
-                <a:solidFill>
-                  <a:srgbClr val="FFFFFF"/>
-                </a:solidFill>
-                <a:latin typeface="Arial"/>
-              </a:rPr>
-              <a:t>4</a:t>
-            </a:r>
-          </a:p>
-        </p:txBody>
-      </p:sp>
-      <p:sp>
-        <p:nvSpPr>
-          <p:cNvPr id="26" name="TextBox 25"/>
-          <p:cNvSpPr txBox="1"/>
-          <p:nvPr/>
-        </p:nvSpPr>
-        <p:spPr>
-          <a:xfrm>
-            <a:off x="7388352" y="2697480"/>
-            <a:ext cx="1636776" cy="2103120"/>
+            <a:off x="5163160" y="3291840"/>
+            <a:ext cx="1865375" cy="1554480"/>
           </a:xfrm>
           <a:prstGeom prst="rect">
             <a:avLst/>
@@ -6294,72 +5681,38 @@
           <a:p>
             <a:pPr algn="ctr"/>
             <a:r>
-              <a:rPr sz="1400">
+              <a:rPr sz="1700" b="1">
                 <a:solidFill>
                   <a:srgbClr val="EEF1F8"/>
                 </a:solidFill>
-                <a:latin typeface="Montserrat"/>
+                <a:latin typeface="Space Grotesk"/>
               </a:rPr>
-              <a:t>Клиент выбирает понравившиеся проекты</a:t>
-            </a:r>
-          </a:p>
-        </p:txBody>
-      </p:sp>
-      <p:sp>
-        <p:nvSpPr>
-          <p:cNvPr id="27" name="TextBox 26"/>
-          <p:cNvSpPr txBox="1"/>
-          <p:nvPr/>
-        </p:nvSpPr>
-        <p:spPr>
-          <a:xfrm>
-            <a:off x="9235440" y="3154679"/>
-            <a:ext cx="201168" cy="365760"/>
-          </a:xfrm>
-          <a:prstGeom prst="rect">
-            <a:avLst/>
-          </a:prstGeom>
-          <a:noFill/>
-        </p:spPr>
-        <p:txBody>
-          <a:bodyPr wrap="none">
-            <a:spAutoFit/>
-          </a:bodyPr>
-          <a:lstStyle/>
-          <a:p>
-            <a:pPr algn="ctr"/>
-            <a:r>
-              <a:rPr sz="1800" b="1">
-                <a:solidFill>
-                  <a:srgbClr val="2C7BFF"/>
-                </a:solidFill>
-                <a:latin typeface="Arial"/>
-              </a:rPr>
-              <a:t>&gt;</a:t>
-            </a:r>
-          </a:p>
-        </p:txBody>
-      </p:sp>
-      <p:sp>
-        <p:nvSpPr>
-          <p:cNvPr id="28" name="Rectangle 27"/>
+              <a:t>Получаете
+подборку</a:t>
+            </a:r>
+          </a:p>
+        </p:txBody>
+      </p:sp>
+      <p:sp>
+        <p:nvSpPr>
+          <p:cNvPr id="17" name="Rectangle 16"/>
           <p:cNvSpPr/>
           <p:nvPr/>
         </p:nvSpPr>
         <p:spPr>
           <a:xfrm>
-            <a:off x="9464040" y="1737360"/>
-            <a:ext cx="1965960" cy="3200400"/>
+            <a:off x="7321143" y="2103120"/>
+            <a:ext cx="2084831" cy="2926080"/>
           </a:xfrm>
           <a:prstGeom prst="rect">
             <a:avLst/>
           </a:prstGeom>
           <a:solidFill>
-            <a:srgbClr val="0D1527"/>
+            <a:srgbClr val="0A0F1C"/>
           </a:solidFill>
-          <a:ln w="6350">
+          <a:ln w="12700">
             <a:solidFill>
-              <a:srgbClr val="222D40"/>
+              <a:srgbClr val="1A284D"/>
             </a:solidFill>
           </a:ln>
         </p:spPr>
@@ -6387,16 +5740,16 @@
       </p:sp>
       <p:sp>
         <p:nvSpPr>
-          <p:cNvPr id="29" name="Rectangle 28"/>
+          <p:cNvPr id="18" name="Oval 17"/>
           <p:cNvSpPr/>
           <p:nvPr/>
         </p:nvSpPr>
         <p:spPr>
           <a:xfrm>
-            <a:off x="10154411" y="1938528"/>
+            <a:off x="8070950" y="2404872"/>
             <a:ext cx="585216" cy="585216"/>
           </a:xfrm>
-          <a:prstGeom prst="rect">
+          <a:prstGeom prst="ellipse">
             <a:avLst/>
           </a:prstGeom>
           <a:solidFill>
@@ -6421,58 +5774,32 @@
           </a:fontRef>
         </p:style>
         <p:txBody>
-          <a:bodyPr rtlCol="0" anchor="ctr"/>
+          <a:bodyPr rtlCol="0" anchor="ctr" wrap="none"/>
           <a:lstStyle/>
           <a:p>
             <a:pPr algn="ctr"/>
-          </a:p>
-        </p:txBody>
-      </p:sp>
-      <p:sp>
-        <p:nvSpPr>
-          <p:cNvPr id="30" name="TextBox 29"/>
+            <a:r>
+              <a:rPr sz="1400" b="1">
+                <a:solidFill>
+                  <a:srgbClr val="EEF1F8"/>
+                </a:solidFill>
+                <a:latin typeface="JetBrains Mono"/>
+              </a:rPr>
+              <a:t>4</a:t>
+            </a:r>
+          </a:p>
+        </p:txBody>
+      </p:sp>
+      <p:sp>
+        <p:nvSpPr>
+          <p:cNvPr id="19" name="TextBox 18"/>
           <p:cNvSpPr txBox="1"/>
           <p:nvPr/>
         </p:nvSpPr>
         <p:spPr>
           <a:xfrm>
-            <a:off x="10154411" y="1938528"/>
-            <a:ext cx="585216" cy="585216"/>
-          </a:xfrm>
-          <a:prstGeom prst="rect">
-            <a:avLst/>
-          </a:prstGeom>
-          <a:noFill/>
-        </p:spPr>
-        <p:txBody>
-          <a:bodyPr wrap="none">
-            <a:spAutoFit/>
-          </a:bodyPr>
-          <a:lstStyle/>
-          <a:p>
-            <a:pPr algn="ctr"/>
-            <a:r>
-              <a:rPr sz="2000" b="1">
-                <a:solidFill>
-                  <a:srgbClr val="FFFFFF"/>
-                </a:solidFill>
-                <a:latin typeface="Arial"/>
-              </a:rPr>
-              <a:t>5</a:t>
-            </a:r>
-          </a:p>
-        </p:txBody>
-      </p:sp>
-      <p:sp>
-        <p:nvSpPr>
-          <p:cNvPr id="31" name="TextBox 30"/>
-          <p:cNvSpPr txBox="1"/>
-          <p:nvPr/>
-        </p:nvSpPr>
-        <p:spPr>
-          <a:xfrm>
-            <a:off x="9628632" y="2697480"/>
-            <a:ext cx="1636776" cy="2103120"/>
+            <a:off x="7430871" y="3291840"/>
+            <a:ext cx="1865375" cy="1554480"/>
           </a:xfrm>
           <a:prstGeom prst="rect">
             <a:avLst/>
@@ -6487,13 +5814,286 @@
           <a:p>
             <a:pPr algn="ctr"/>
             <a:r>
-              <a:rPr sz="1400">
+              <a:rPr sz="1700" b="1">
                 <a:solidFill>
                   <a:srgbClr val="EEF1F8"/>
                 </a:solidFill>
-                <a:latin typeface="Montserrat"/>
+                <a:latin typeface="Space Grotesk"/>
               </a:rPr>
-              <a:t>Платформа помогает забронировать услуги</a:t>
+              <a:t>Выбираете
+проекты</a:t>
+            </a:r>
+          </a:p>
+        </p:txBody>
+      </p:sp>
+      <p:sp>
+        <p:nvSpPr>
+          <p:cNvPr id="20" name="Rectangle 19"/>
+          <p:cNvSpPr/>
+          <p:nvPr/>
+        </p:nvSpPr>
+        <p:spPr>
+          <a:xfrm>
+            <a:off x="9588854" y="2103120"/>
+            <a:ext cx="2084831" cy="2926080"/>
+          </a:xfrm>
+          <a:prstGeom prst="rect">
+            <a:avLst/>
+          </a:prstGeom>
+          <a:solidFill>
+            <a:srgbClr val="0A0F1C"/>
+          </a:solidFill>
+          <a:ln w="12700">
+            <a:solidFill>
+              <a:srgbClr val="1A284D"/>
+            </a:solidFill>
+          </a:ln>
+        </p:spPr>
+        <p:style>
+          <a:lnRef idx="1">
+            <a:schemeClr val="accent1"/>
+          </a:lnRef>
+          <a:fillRef idx="3">
+            <a:schemeClr val="accent1"/>
+          </a:fillRef>
+          <a:effectRef idx="2">
+            <a:schemeClr val="accent1"/>
+          </a:effectRef>
+          <a:fontRef idx="minor">
+            <a:schemeClr val="lt1"/>
+          </a:fontRef>
+        </p:style>
+        <p:txBody>
+          <a:bodyPr rtlCol="0" anchor="ctr"/>
+          <a:lstStyle/>
+          <a:p>
+            <a:pPr algn="ctr"/>
+          </a:p>
+        </p:txBody>
+      </p:sp>
+      <p:sp>
+        <p:nvSpPr>
+          <p:cNvPr id="21" name="Oval 20"/>
+          <p:cNvSpPr/>
+          <p:nvPr/>
+        </p:nvSpPr>
+        <p:spPr>
+          <a:xfrm>
+            <a:off x="10338661" y="2404872"/>
+            <a:ext cx="585216" cy="585216"/>
+          </a:xfrm>
+          <a:prstGeom prst="ellipse">
+            <a:avLst/>
+          </a:prstGeom>
+          <a:solidFill>
+            <a:srgbClr val="2C7BFF"/>
+          </a:solidFill>
+          <a:ln>
+            <a:noFill/>
+          </a:ln>
+        </p:spPr>
+        <p:style>
+          <a:lnRef idx="1">
+            <a:schemeClr val="accent1"/>
+          </a:lnRef>
+          <a:fillRef idx="3">
+            <a:schemeClr val="accent1"/>
+          </a:fillRef>
+          <a:effectRef idx="2">
+            <a:schemeClr val="accent1"/>
+          </a:effectRef>
+          <a:fontRef idx="minor">
+            <a:schemeClr val="lt1"/>
+          </a:fontRef>
+        </p:style>
+        <p:txBody>
+          <a:bodyPr rtlCol="0" anchor="ctr" wrap="none"/>
+          <a:lstStyle/>
+          <a:p>
+            <a:pPr algn="ctr"/>
+            <a:r>
+              <a:rPr sz="1400" b="1">
+                <a:solidFill>
+                  <a:srgbClr val="EEF1F8"/>
+                </a:solidFill>
+                <a:latin typeface="JetBrains Mono"/>
+              </a:rPr>
+              <a:t>5</a:t>
+            </a:r>
+          </a:p>
+        </p:txBody>
+      </p:sp>
+      <p:sp>
+        <p:nvSpPr>
+          <p:cNvPr id="22" name="TextBox 21"/>
+          <p:cNvSpPr txBox="1"/>
+          <p:nvPr/>
+        </p:nvSpPr>
+        <p:spPr>
+          <a:xfrm>
+            <a:off x="9698582" y="3291840"/>
+            <a:ext cx="1865375" cy="1554480"/>
+          </a:xfrm>
+          <a:prstGeom prst="rect">
+            <a:avLst/>
+          </a:prstGeom>
+          <a:noFill/>
+        </p:spPr>
+        <p:txBody>
+          <a:bodyPr wrap="square">
+            <a:spAutoFit/>
+          </a:bodyPr>
+          <a:lstStyle/>
+          <a:p>
+            <a:pPr algn="ctr"/>
+            <a:r>
+              <a:rPr sz="1700" b="1">
+                <a:solidFill>
+                  <a:srgbClr val="EEF1F8"/>
+                </a:solidFill>
+                <a:latin typeface="Space Grotesk"/>
+              </a:rPr>
+              <a:t>Бронируете</a:t>
+            </a:r>
+          </a:p>
+        </p:txBody>
+      </p:sp>
+      <p:sp>
+        <p:nvSpPr>
+          <p:cNvPr id="23" name="TextBox 22"/>
+          <p:cNvSpPr txBox="1"/>
+          <p:nvPr/>
+        </p:nvSpPr>
+        <p:spPr>
+          <a:xfrm>
+            <a:off x="2602841" y="3401568"/>
+            <a:ext cx="182880" cy="329184"/>
+          </a:xfrm>
+          <a:prstGeom prst="rect">
+            <a:avLst/>
+          </a:prstGeom>
+          <a:noFill/>
+        </p:spPr>
+        <p:txBody>
+          <a:bodyPr wrap="square">
+            <a:spAutoFit/>
+          </a:bodyPr>
+          <a:lstStyle/>
+          <a:p>
+            <a:pPr algn="ctr"/>
+            <a:r>
+              <a:rPr sz="1600" b="1">
+                <a:solidFill>
+                  <a:srgbClr val="5AA0FF"/>
+                </a:solidFill>
+                <a:latin typeface="JetBrains Mono"/>
+              </a:rPr>
+              <a:t>&gt;</a:t>
+            </a:r>
+          </a:p>
+        </p:txBody>
+      </p:sp>
+      <p:sp>
+        <p:nvSpPr>
+          <p:cNvPr id="24" name="TextBox 23"/>
+          <p:cNvSpPr txBox="1"/>
+          <p:nvPr/>
+        </p:nvSpPr>
+        <p:spPr>
+          <a:xfrm>
+            <a:off x="4870552" y="3401568"/>
+            <a:ext cx="182880" cy="329184"/>
+          </a:xfrm>
+          <a:prstGeom prst="rect">
+            <a:avLst/>
+          </a:prstGeom>
+          <a:noFill/>
+        </p:spPr>
+        <p:txBody>
+          <a:bodyPr wrap="square">
+            <a:spAutoFit/>
+          </a:bodyPr>
+          <a:lstStyle/>
+          <a:p>
+            <a:pPr algn="ctr"/>
+            <a:r>
+              <a:rPr sz="1600" b="1">
+                <a:solidFill>
+                  <a:srgbClr val="5AA0FF"/>
+                </a:solidFill>
+                <a:latin typeface="JetBrains Mono"/>
+              </a:rPr>
+              <a:t>&gt;</a:t>
+            </a:r>
+          </a:p>
+        </p:txBody>
+      </p:sp>
+      <p:sp>
+        <p:nvSpPr>
+          <p:cNvPr id="25" name="TextBox 24"/>
+          <p:cNvSpPr txBox="1"/>
+          <p:nvPr/>
+        </p:nvSpPr>
+        <p:spPr>
+          <a:xfrm>
+            <a:off x="7138263" y="3401568"/>
+            <a:ext cx="182880" cy="329184"/>
+          </a:xfrm>
+          <a:prstGeom prst="rect">
+            <a:avLst/>
+          </a:prstGeom>
+          <a:noFill/>
+        </p:spPr>
+        <p:txBody>
+          <a:bodyPr wrap="square">
+            <a:spAutoFit/>
+          </a:bodyPr>
+          <a:lstStyle/>
+          <a:p>
+            <a:pPr algn="ctr"/>
+            <a:r>
+              <a:rPr sz="1600" b="1">
+                <a:solidFill>
+                  <a:srgbClr val="5AA0FF"/>
+                </a:solidFill>
+                <a:latin typeface="JetBrains Mono"/>
+              </a:rPr>
+              <a:t>&gt;</a:t>
+            </a:r>
+          </a:p>
+        </p:txBody>
+      </p:sp>
+      <p:sp>
+        <p:nvSpPr>
+          <p:cNvPr id="26" name="TextBox 25"/>
+          <p:cNvSpPr txBox="1"/>
+          <p:nvPr/>
+        </p:nvSpPr>
+        <p:spPr>
+          <a:xfrm>
+            <a:off x="9405974" y="3401568"/>
+            <a:ext cx="182880" cy="329184"/>
+          </a:xfrm>
+          <a:prstGeom prst="rect">
+            <a:avLst/>
+          </a:prstGeom>
+          <a:noFill/>
+        </p:spPr>
+        <p:txBody>
+          <a:bodyPr wrap="square">
+            <a:spAutoFit/>
+          </a:bodyPr>
+          <a:lstStyle/>
+          <a:p>
+            <a:pPr algn="ctr"/>
+            <a:r>
+              <a:rPr sz="1600" b="1">
+                <a:solidFill>
+                  <a:srgbClr val="5AA0FF"/>
+                </a:solidFill>
+                <a:latin typeface="JetBrains Mono"/>
+              </a:rPr>
+              <a:t>&gt;</a:t>
             </a:r>
           </a:p>
         </p:txBody>
@@ -6516,95 +6116,9 @@
         <p:nvPr/>
       </p:nvGrpSpPr>
       <p:grpSpPr/>
-      <p:sp>
-        <p:nvSpPr>
-          <p:cNvPr id="2" name="Rectangle 1"/>
-          <p:cNvSpPr/>
-          <p:nvPr/>
-        </p:nvSpPr>
-        <p:spPr>
-          <a:xfrm>
-            <a:off x="0" y="0"/>
-            <a:ext cx="12191695" cy="6858000"/>
-          </a:xfrm>
-          <a:prstGeom prst="rect">
-            <a:avLst/>
-          </a:prstGeom>
-          <a:solidFill>
-            <a:srgbClr val="04060B"/>
-          </a:solidFill>
-          <a:ln>
-            <a:noFill/>
-          </a:ln>
-        </p:spPr>
-        <p:style>
-          <a:lnRef idx="1">
-            <a:schemeClr val="accent1"/>
-          </a:lnRef>
-          <a:fillRef idx="3">
-            <a:schemeClr val="accent1"/>
-          </a:fillRef>
-          <a:effectRef idx="2">
-            <a:schemeClr val="accent1"/>
-          </a:effectRef>
-          <a:fontRef idx="minor">
-            <a:schemeClr val="lt1"/>
-          </a:fontRef>
-        </p:style>
-        <p:txBody>
-          <a:bodyPr rtlCol="0" anchor="ctr"/>
-          <a:lstStyle/>
-          <a:p>
-            <a:pPr algn="ctr"/>
-          </a:p>
-        </p:txBody>
-      </p:sp>
-      <p:sp>
-        <p:nvSpPr>
-          <p:cNvPr id="3" name="Rectangle 2"/>
-          <p:cNvSpPr/>
-          <p:nvPr/>
-        </p:nvSpPr>
-        <p:spPr>
-          <a:xfrm>
-            <a:off x="6858000" y="0"/>
-            <a:ext cx="5333695" cy="3200400"/>
-          </a:xfrm>
-          <a:prstGeom prst="rect">
-            <a:avLst/>
-          </a:prstGeom>
-          <a:solidFill>
-            <a:srgbClr val="0A1124"/>
-          </a:solidFill>
-          <a:ln>
-            <a:noFill/>
-          </a:ln>
-        </p:spPr>
-        <p:style>
-          <a:lnRef idx="1">
-            <a:schemeClr val="accent1"/>
-          </a:lnRef>
-          <a:fillRef idx="3">
-            <a:schemeClr val="accent1"/>
-          </a:fillRef>
-          <a:effectRef idx="2">
-            <a:schemeClr val="accent1"/>
-          </a:effectRef>
-          <a:fontRef idx="minor">
-            <a:schemeClr val="lt1"/>
-          </a:fontRef>
-        </p:style>
-        <p:txBody>
-          <a:bodyPr rtlCol="0" anchor="ctr"/>
-          <a:lstStyle/>
-          <a:p>
-            <a:pPr algn="ctr"/>
-          </a:p>
-        </p:txBody>
-      </p:sp>
       <p:pic>
         <p:nvPicPr>
-          <p:cNvPr id="4" name="Picture 3" descr="logo-dark.png"/>
+          <p:cNvPr id="2" name="Picture 1" descr="bg-accent__1920x1080.png"/>
           <p:cNvPicPr>
             <a:picLocks noChangeAspect="1"/>
           </p:cNvPicPr>
@@ -6618,24 +6132,48 @@
         </p:blipFill>
         <p:spPr>
           <a:xfrm>
-            <a:off x="11098987" y="182880"/>
-            <a:ext cx="864108" cy="256031"/>
+            <a:off x="0" y="0"/>
+            <a:ext cx="12191695" cy="6858000"/>
           </a:xfrm>
           <a:prstGeom prst="rect">
             <a:avLst/>
           </a:prstGeom>
         </p:spPr>
       </p:pic>
-      <p:sp>
-        <p:nvSpPr>
-          <p:cNvPr id="5" name="TextBox 4"/>
+      <p:pic>
+        <p:nvPicPr>
+          <p:cNvPr id="3" name="Picture 2" descr="logo-dark.png"/>
+          <p:cNvPicPr>
+            <a:picLocks noChangeAspect="1"/>
+          </p:cNvPicPr>
+          <p:nvPr/>
+        </p:nvPicPr>
+        <p:blipFill>
+          <a:blip r:embed="rId3"/>
+          <a:stretch>
+            <a:fillRect/>
+          </a:stretch>
+        </p:blipFill>
+        <p:spPr>
+          <a:xfrm>
+            <a:off x="594360" y="201168"/>
+            <a:ext cx="1227242" cy="347472"/>
+          </a:xfrm>
+          <a:prstGeom prst="rect">
+            <a:avLst/>
+          </a:prstGeom>
+        </p:spPr>
+      </p:pic>
+      <p:sp>
+        <p:nvSpPr>
+          <p:cNvPr id="4" name="TextBox 3"/>
           <p:cNvSpPr txBox="1"/>
           <p:nvPr/>
         </p:nvSpPr>
         <p:spPr>
           <a:xfrm>
-            <a:off x="502920" y="228600"/>
-            <a:ext cx="5486400" cy="320040"/>
+            <a:off x="11185855" y="502920"/>
+            <a:ext cx="731520" cy="365760"/>
           </a:xfrm>
           <a:prstGeom prst="rect">
             <a:avLst/>
@@ -6648,29 +6186,29 @@
           </a:bodyPr>
           <a:lstStyle/>
           <a:p>
-            <a:pPr algn="l"/>
-            <a:r>
-              <a:rPr sz="1100" b="1" i="0">
-                <a:solidFill>
-                  <a:srgbClr val="2C7BFF"/>
-                </a:solidFill>
-                <a:latin typeface="Arial"/>
+            <a:pPr algn="r"/>
+            <a:r>
+              <a:rPr sz="1100" b="0">
+                <a:solidFill>
+                  <a:srgbClr val="9AA4B6"/>
+                </a:solidFill>
+                <a:latin typeface="JetBrains Mono"/>
               </a:rPr>
-              <a:t>МОНЕТИЗАЦИЯ</a:t>
-            </a:r>
-          </a:p>
-        </p:txBody>
-      </p:sp>
-      <p:sp>
-        <p:nvSpPr>
-          <p:cNvPr id="6" name="TextBox 5"/>
+              <a:t>04</a:t>
+            </a:r>
+          </a:p>
+        </p:txBody>
+      </p:sp>
+      <p:sp>
+        <p:nvSpPr>
+          <p:cNvPr id="5" name="TextBox 4"/>
           <p:cNvSpPr txBox="1"/>
           <p:nvPr/>
         </p:nvSpPr>
         <p:spPr>
           <a:xfrm>
-            <a:off x="502920" y="502920"/>
-            <a:ext cx="9144000" cy="685800"/>
+            <a:off x="685800" y="502920"/>
+            <a:ext cx="10820095" cy="320040"/>
           </a:xfrm>
           <a:prstGeom prst="rect">
             <a:avLst/>
@@ -6685,13 +6223,48 @@
           <a:p>
             <a:pPr algn="l"/>
             <a:r>
-              <a:rPr sz="3800" b="1" i="0">
+              <a:rPr sz="1100" b="0">
+                <a:solidFill>
+                  <a:srgbClr val="5AA0FF"/>
+                </a:solidFill>
+                <a:latin typeface="JetBrains Mono"/>
+              </a:rPr>
+              <a:t>МОНЕТИЗАЦИЯ</a:t>
+            </a:r>
+          </a:p>
+        </p:txBody>
+      </p:sp>
+      <p:sp>
+        <p:nvSpPr>
+          <p:cNvPr id="6" name="TextBox 5"/>
+          <p:cNvSpPr txBox="1"/>
+          <p:nvPr/>
+        </p:nvSpPr>
+        <p:spPr>
+          <a:xfrm>
+            <a:off x="685800" y="868680"/>
+            <a:ext cx="10820095" cy="822960"/>
+          </a:xfrm>
+          <a:prstGeom prst="rect">
+            <a:avLst/>
+          </a:prstGeom>
+          <a:noFill/>
+        </p:spPr>
+        <p:txBody>
+          <a:bodyPr wrap="square">
+            <a:spAutoFit/>
+          </a:bodyPr>
+          <a:lstStyle/>
+          <a:p>
+            <a:pPr algn="l"/>
+            <a:r>
+              <a:rPr sz="3800" b="1">
                 <a:solidFill>
                   <a:srgbClr val="EEF1F8"/>
                 </a:solidFill>
-                <a:latin typeface="Montserrat"/>
+                <a:latin typeface="Space Grotesk"/>
               </a:rPr>
-              <a:t>Бизнес-модель EVENT AI</a:t>
+              <a:t>Как зарабатывает платформа</a:t>
             </a:r>
           </a:p>
         </p:txBody>
@@ -6704,14 +6277,14 @@
         </p:nvSpPr>
         <p:spPr>
           <a:xfrm>
-            <a:off x="502920" y="1261872"/>
-            <a:ext cx="11155680" cy="18288"/>
+            <a:off x="685800" y="1828800"/>
+            <a:ext cx="640080" cy="12700"/>
           </a:xfrm>
           <a:prstGeom prst="rect">
             <a:avLst/>
           </a:prstGeom>
           <a:solidFill>
-            <a:srgbClr val="222D40"/>
+            <a:srgbClr val="2C7BFF"/>
           </a:solidFill>
           <a:ln>
             <a:noFill/>
@@ -6747,16 +6320,16 @@
         </p:nvSpPr>
         <p:spPr>
           <a:xfrm>
-            <a:off x="457200" y="1417320"/>
-            <a:ext cx="2377440" cy="502920"/>
+            <a:off x="1546707" y="2057400"/>
+            <a:ext cx="4114800" cy="1920240"/>
           </a:xfrm>
           <a:prstGeom prst="rect">
             <a:avLst/>
           </a:prstGeom>
           <a:solidFill>
-            <a:srgbClr val="0D1527"/>
+            <a:srgbClr val="060C18"/>
           </a:solidFill>
-          <a:ln w="9525">
+          <a:ln w="12700">
             <a:solidFill>
               <a:srgbClr val="2C7BFF"/>
             </a:solidFill>
@@ -6792,8 +6365,8 @@
         </p:nvSpPr>
         <p:spPr>
           <a:xfrm>
-            <a:off x="457200" y="1417320"/>
-            <a:ext cx="2377440" cy="502920"/>
+            <a:off x="1711299" y="2221992"/>
+            <a:ext cx="3785616" cy="1005840"/>
           </a:xfrm>
           <a:prstGeom prst="rect">
             <a:avLst/>
@@ -6801,42 +6374,77 @@
           <a:noFill/>
         </p:spPr>
         <p:txBody>
-          <a:bodyPr wrap="none">
+          <a:bodyPr wrap="square">
             <a:spAutoFit/>
           </a:bodyPr>
           <a:lstStyle/>
           <a:p>
             <a:pPr algn="ctr"/>
             <a:r>
-              <a:rPr sz="1500" b="1">
+              <a:rPr sz="4400" b="1">
                 <a:solidFill>
                   <a:srgbClr val="EEF1F8"/>
+                </a:solidFill>
+                <a:latin typeface="JetBrains Mono"/>
+              </a:rPr>
+              <a:t>7%</a:t>
+            </a:r>
+          </a:p>
+        </p:txBody>
+      </p:sp>
+      <p:sp>
+        <p:nvSpPr>
+          <p:cNvPr id="10" name="TextBox 9"/>
+          <p:cNvSpPr txBox="1"/>
+          <p:nvPr/>
+        </p:nvSpPr>
+        <p:spPr>
+          <a:xfrm>
+            <a:off x="1711299" y="3291840"/>
+            <a:ext cx="3785616" cy="502920"/>
+          </a:xfrm>
+          <a:prstGeom prst="rect">
+            <a:avLst/>
+          </a:prstGeom>
+          <a:noFill/>
+        </p:spPr>
+        <p:txBody>
+          <a:bodyPr wrap="square">
+            <a:spAutoFit/>
+          </a:bodyPr>
+          <a:lstStyle/>
+          <a:p>
+            <a:pPr algn="ctr"/>
+            <a:r>
+              <a:rPr sz="1500" b="0">
+                <a:solidFill>
+                  <a:srgbClr val="9AA4B6"/>
                 </a:solidFill>
                 <a:latin typeface="Montserrat"/>
               </a:rPr>
-              <a:t>Клиент</a:t>
-            </a:r>
-          </a:p>
-        </p:txBody>
-      </p:sp>
-      <p:sp>
-        <p:nvSpPr>
-          <p:cNvPr id="10" name="Rectangle 9"/>
+              <a:t>Комиссия с каждого заказа</a:t>
+            </a:r>
+          </a:p>
+        </p:txBody>
+      </p:sp>
+      <p:sp>
+        <p:nvSpPr>
+          <p:cNvPr id="11" name="Rectangle 10"/>
           <p:cNvSpPr/>
           <p:nvPr/>
         </p:nvSpPr>
         <p:spPr>
           <a:xfrm>
-            <a:off x="4389120" y="1417320"/>
-            <a:ext cx="2377440" cy="502920"/>
+            <a:off x="5981547" y="2057400"/>
+            <a:ext cx="4114800" cy="1920240"/>
           </a:xfrm>
           <a:prstGeom prst="rect">
             <a:avLst/>
           </a:prstGeom>
           <a:solidFill>
-            <a:srgbClr val="2C7BFF"/>
+            <a:srgbClr val="060C18"/>
           </a:solidFill>
-          <a:ln w="9525">
+          <a:ln w="12700">
             <a:solidFill>
               <a:srgbClr val="2C7BFF"/>
             </a:solidFill>
@@ -6866,14 +6474,14 @@
       </p:sp>
       <p:sp>
         <p:nvSpPr>
-          <p:cNvPr id="11" name="TextBox 10"/>
+          <p:cNvPr id="12" name="TextBox 11"/>
           <p:cNvSpPr txBox="1"/>
           <p:nvPr/>
         </p:nvSpPr>
         <p:spPr>
           <a:xfrm>
-            <a:off x="4389120" y="1417320"/>
-            <a:ext cx="2377440" cy="502920"/>
+            <a:off x="6146139" y="2221992"/>
+            <a:ext cx="3785616" cy="1005840"/>
           </a:xfrm>
           <a:prstGeom prst="rect">
             <a:avLst/>
@@ -6881,44 +6489,79 @@
           <a:noFill/>
         </p:spPr>
         <p:txBody>
-          <a:bodyPr wrap="none">
+          <a:bodyPr wrap="square">
             <a:spAutoFit/>
           </a:bodyPr>
           <a:lstStyle/>
           <a:p>
             <a:pPr algn="ctr"/>
             <a:r>
-              <a:rPr sz="1500" b="1">
+              <a:rPr sz="4400" b="1">
                 <a:solidFill>
                   <a:srgbClr val="EEF1F8"/>
+                </a:solidFill>
+                <a:latin typeface="JetBrains Mono"/>
+              </a:rPr>
+              <a:t>50 000 ₸</a:t>
+            </a:r>
+          </a:p>
+        </p:txBody>
+      </p:sp>
+      <p:sp>
+        <p:nvSpPr>
+          <p:cNvPr id="13" name="TextBox 12"/>
+          <p:cNvSpPr txBox="1"/>
+          <p:nvPr/>
+        </p:nvSpPr>
+        <p:spPr>
+          <a:xfrm>
+            <a:off x="6146139" y="3291840"/>
+            <a:ext cx="3785616" cy="502920"/>
+          </a:xfrm>
+          <a:prstGeom prst="rect">
+            <a:avLst/>
+          </a:prstGeom>
+          <a:noFill/>
+        </p:spPr>
+        <p:txBody>
+          <a:bodyPr wrap="square">
+            <a:spAutoFit/>
+          </a:bodyPr>
+          <a:lstStyle/>
+          <a:p>
+            <a:pPr algn="ctr"/>
+            <a:r>
+              <a:rPr sz="1500" b="0">
+                <a:solidFill>
+                  <a:srgbClr val="9AA4B6"/>
                 </a:solidFill>
                 <a:latin typeface="Montserrat"/>
               </a:rPr>
-              <a:t>Платформа</a:t>
-            </a:r>
-          </a:p>
-        </p:txBody>
-      </p:sp>
-      <p:sp>
-        <p:nvSpPr>
-          <p:cNvPr id="12" name="Rectangle 11"/>
+              <a:t>Стоимость бронирования</a:t>
+            </a:r>
+          </a:p>
+        </p:txBody>
+      </p:sp>
+      <p:sp>
+        <p:nvSpPr>
+          <p:cNvPr id="14" name="Rectangle 13"/>
           <p:cNvSpPr/>
           <p:nvPr/>
         </p:nvSpPr>
         <p:spPr>
           <a:xfrm>
-            <a:off x="8229600" y="1417320"/>
-            <a:ext cx="2377440" cy="502920"/>
+            <a:off x="819759" y="4251960"/>
+            <a:ext cx="3383280" cy="868680"/>
           </a:xfrm>
           <a:prstGeom prst="rect">
             <a:avLst/>
           </a:prstGeom>
           <a:solidFill>
-            <a:srgbClr val="0D1527"/>
+            <a:srgbClr val="0A0F1C"/>
           </a:solidFill>
           <a:ln w="9525">
             <a:solidFill>
-              <a:srgbClr val="2C7BFF"/>
+              <a:srgbClr val="1A284D"/>
             </a:solidFill>
           </a:ln>
         </p:spPr>
@@ -6946,14 +6589,14 @@
       </p:sp>
       <p:sp>
         <p:nvSpPr>
-          <p:cNvPr id="13" name="TextBox 12"/>
+          <p:cNvPr id="15" name="TextBox 14"/>
           <p:cNvSpPr txBox="1"/>
           <p:nvPr/>
         </p:nvSpPr>
         <p:spPr>
           <a:xfrm>
-            <a:off x="8229600" y="1417320"/>
-            <a:ext cx="2377440" cy="502920"/>
+            <a:off x="984351" y="4434840"/>
+            <a:ext cx="3054096" cy="594360"/>
           </a:xfrm>
           <a:prstGeom prst="rect">
             <a:avLst/>
@@ -6961,249 +6604,45 @@
           <a:noFill/>
         </p:spPr>
         <p:txBody>
-          <a:bodyPr wrap="none">
+          <a:bodyPr wrap="square">
             <a:spAutoFit/>
           </a:bodyPr>
           <a:lstStyle/>
           <a:p>
             <a:pPr algn="ctr"/>
             <a:r>
-              <a:rPr sz="1500" b="1">
+              <a:rPr sz="1600" b="0">
                 <a:solidFill>
                   <a:srgbClr val="EEF1F8"/>
                 </a:solidFill>
-                <a:latin typeface="Montserrat"/>
+                <a:latin typeface="Space Grotesk"/>
               </a:rPr>
-              <a:t>Партнёр</a:t>
-            </a:r>
-          </a:p>
-        </p:txBody>
-      </p:sp>
-      <p:sp>
-        <p:nvSpPr>
-          <p:cNvPr id="14" name="TextBox 13"/>
-          <p:cNvSpPr txBox="1"/>
-          <p:nvPr/>
-        </p:nvSpPr>
-        <p:spPr>
-          <a:xfrm>
-            <a:off x="2971800" y="1490472"/>
-            <a:ext cx="411480" cy="365760"/>
-          </a:xfrm>
-          <a:prstGeom prst="rect">
-            <a:avLst/>
-          </a:prstGeom>
-          <a:noFill/>
-        </p:spPr>
-        <p:txBody>
-          <a:bodyPr wrap="none">
-            <a:spAutoFit/>
-          </a:bodyPr>
-          <a:lstStyle/>
-          <a:p>
-            <a:pPr algn="ctr"/>
-            <a:r>
-              <a:rPr sz="2000" b="1">
-                <a:solidFill>
-                  <a:srgbClr val="2C7BFF"/>
-                </a:solidFill>
-                <a:latin typeface="Arial"/>
-              </a:rPr>
-              <a:t>→</a:t>
-            </a:r>
-          </a:p>
-        </p:txBody>
-      </p:sp>
-      <p:sp>
-        <p:nvSpPr>
-          <p:cNvPr id="15" name="TextBox 14"/>
-          <p:cNvSpPr txBox="1"/>
-          <p:nvPr/>
-        </p:nvSpPr>
-        <p:spPr>
-          <a:xfrm>
-            <a:off x="6903720" y="1490472"/>
-            <a:ext cx="411480" cy="365760"/>
-          </a:xfrm>
-          <a:prstGeom prst="rect">
-            <a:avLst/>
-          </a:prstGeom>
-          <a:noFill/>
-        </p:spPr>
-        <p:txBody>
-          <a:bodyPr wrap="none">
-            <a:spAutoFit/>
-          </a:bodyPr>
-          <a:lstStyle/>
-          <a:p>
-            <a:pPr algn="ctr"/>
-            <a:r>
-              <a:rPr sz="2000" b="1">
-                <a:solidFill>
-                  <a:srgbClr val="2C7BFF"/>
-                </a:solidFill>
-                <a:latin typeface="Arial"/>
-              </a:rPr>
-              <a:t>→</a:t>
-            </a:r>
-          </a:p>
-        </p:txBody>
-      </p:sp>
-      <p:sp>
-        <p:nvSpPr>
-          <p:cNvPr id="16" name="TextBox 15"/>
-          <p:cNvSpPr txBox="1"/>
-          <p:nvPr/>
-        </p:nvSpPr>
-        <p:spPr>
-          <a:xfrm>
-            <a:off x="502920" y="2148840"/>
-            <a:ext cx="1828800" cy="914400"/>
-          </a:xfrm>
-          <a:prstGeom prst="rect">
-            <a:avLst/>
-          </a:prstGeom>
-          <a:noFill/>
-        </p:spPr>
-        <p:txBody>
-          <a:bodyPr wrap="none">
-            <a:spAutoFit/>
-          </a:bodyPr>
-          <a:lstStyle/>
-          <a:p>
-            <a:r>
-              <a:rPr sz="5200" b="1">
-                <a:solidFill>
-                  <a:srgbClr val="2C7BFF"/>
-                </a:solidFill>
-                <a:latin typeface="Arial"/>
-              </a:rPr>
-              <a:t>7%</a:t>
-            </a:r>
-          </a:p>
-        </p:txBody>
-      </p:sp>
-      <p:sp>
-        <p:nvSpPr>
-          <p:cNvPr id="17" name="TextBox 16"/>
-          <p:cNvSpPr txBox="1"/>
-          <p:nvPr/>
-        </p:nvSpPr>
-        <p:spPr>
-          <a:xfrm>
-            <a:off x="502920" y="2971800"/>
-            <a:ext cx="2926080" cy="320040"/>
-          </a:xfrm>
-          <a:prstGeom prst="rect">
-            <a:avLst/>
-          </a:prstGeom>
-          <a:noFill/>
-        </p:spPr>
-        <p:txBody>
-          <a:bodyPr wrap="none">
-            <a:spAutoFit/>
-          </a:bodyPr>
-          <a:lstStyle/>
-          <a:p>
-            <a:r>
-              <a:rPr sz="1200">
-                <a:solidFill>
-                  <a:srgbClr val="9AA4B6"/>
-                </a:solidFill>
-                <a:latin typeface="Montserrat"/>
-              </a:rPr>
-              <a:t>комиссия с подтверждённых заказов</a:t>
-            </a:r>
-          </a:p>
-        </p:txBody>
-      </p:sp>
-      <p:sp>
-        <p:nvSpPr>
-          <p:cNvPr id="18" name="TextBox 17"/>
-          <p:cNvSpPr txBox="1"/>
-          <p:nvPr/>
-        </p:nvSpPr>
-        <p:spPr>
-          <a:xfrm>
-            <a:off x="2834640" y="2148840"/>
-            <a:ext cx="3657600" cy="914400"/>
-          </a:xfrm>
-          <a:prstGeom prst="rect">
-            <a:avLst/>
-          </a:prstGeom>
-          <a:noFill/>
-        </p:spPr>
-        <p:txBody>
-          <a:bodyPr wrap="none">
-            <a:spAutoFit/>
-          </a:bodyPr>
-          <a:lstStyle/>
-          <a:p>
-            <a:r>
-              <a:rPr sz="4200" b="1">
-                <a:solidFill>
-                  <a:srgbClr val="2C7BFF"/>
-                </a:solidFill>
-                <a:latin typeface="Arial"/>
-              </a:rPr>
-              <a:t>50 000 ₸</a:t>
-            </a:r>
-          </a:p>
-        </p:txBody>
-      </p:sp>
-      <p:sp>
-        <p:nvSpPr>
-          <p:cNvPr id="19" name="TextBox 18"/>
-          <p:cNvSpPr txBox="1"/>
-          <p:nvPr/>
-        </p:nvSpPr>
-        <p:spPr>
-          <a:xfrm>
-            <a:off x="2834640" y="2971800"/>
-            <a:ext cx="3200400" cy="320040"/>
-          </a:xfrm>
-          <a:prstGeom prst="rect">
-            <a:avLst/>
-          </a:prstGeom>
-          <a:noFill/>
-        </p:spPr>
-        <p:txBody>
-          <a:bodyPr wrap="none">
-            <a:spAutoFit/>
-          </a:bodyPr>
-          <a:lstStyle/>
-          <a:p>
-            <a:r>
-              <a:rPr sz="1200">
-                <a:solidFill>
-                  <a:srgbClr val="9AA4B6"/>
-                </a:solidFill>
-                <a:latin typeface="Montserrat"/>
-              </a:rPr>
-              <a:t>оплата бронирования</a:t>
-            </a:r>
-          </a:p>
-        </p:txBody>
-      </p:sp>
-      <p:sp>
-        <p:nvSpPr>
-          <p:cNvPr id="20" name="Rectangle 19"/>
+              <a:t>Продвижение партнёров</a:t>
+            </a:r>
+          </a:p>
+        </p:txBody>
+      </p:sp>
+      <p:sp>
+        <p:nvSpPr>
+          <p:cNvPr id="16" name="Rectangle 15"/>
           <p:cNvSpPr/>
           <p:nvPr/>
         </p:nvSpPr>
         <p:spPr>
           <a:xfrm>
-            <a:off x="502920" y="3337560"/>
-            <a:ext cx="11155680" cy="18288"/>
+            <a:off x="4404207" y="4251960"/>
+            <a:ext cx="3383280" cy="868680"/>
           </a:xfrm>
           <a:prstGeom prst="rect">
             <a:avLst/>
           </a:prstGeom>
           <a:solidFill>
-            <a:srgbClr val="222D40"/>
+            <a:srgbClr val="0A0F1C"/>
           </a:solidFill>
-          <a:ln>
-            <a:noFill/>
+          <a:ln w="9525">
+            <a:solidFill>
+              <a:srgbClr val="1A284D"/>
+            </a:solidFill>
           </a:ln>
         </p:spPr>
         <p:style>
@@ -7230,23 +6669,60 @@
       </p:sp>
       <p:sp>
         <p:nvSpPr>
-          <p:cNvPr id="21" name="Rectangle 20"/>
+          <p:cNvPr id="17" name="TextBox 16"/>
+          <p:cNvSpPr txBox="1"/>
+          <p:nvPr/>
+        </p:nvSpPr>
+        <p:spPr>
+          <a:xfrm>
+            <a:off x="4568799" y="4434840"/>
+            <a:ext cx="3054096" cy="594360"/>
+          </a:xfrm>
+          <a:prstGeom prst="rect">
+            <a:avLst/>
+          </a:prstGeom>
+          <a:noFill/>
+        </p:spPr>
+        <p:txBody>
+          <a:bodyPr wrap="square">
+            <a:spAutoFit/>
+          </a:bodyPr>
+          <a:lstStyle/>
+          <a:p>
+            <a:pPr algn="ctr"/>
+            <a:r>
+              <a:rPr sz="1600" b="0">
+                <a:solidFill>
+                  <a:srgbClr val="EEF1F8"/>
+                </a:solidFill>
+                <a:latin typeface="Space Grotesk"/>
+              </a:rPr>
+              <a:t>Премиум-размещение</a:t>
+            </a:r>
+          </a:p>
+        </p:txBody>
+      </p:sp>
+      <p:sp>
+        <p:nvSpPr>
+          <p:cNvPr id="18" name="Rectangle 17"/>
           <p:cNvSpPr/>
           <p:nvPr/>
         </p:nvSpPr>
         <p:spPr>
           <a:xfrm>
-            <a:off x="502920" y="3657600"/>
-            <a:ext cx="109728" cy="109728"/>
+            <a:off x="7988655" y="4251960"/>
+            <a:ext cx="3383280" cy="868680"/>
           </a:xfrm>
           <a:prstGeom prst="rect">
             <a:avLst/>
           </a:prstGeom>
           <a:solidFill>
-            <a:srgbClr val="5AA0FF"/>
+            <a:srgbClr val="0A0F1C"/>
           </a:solidFill>
-          <a:ln>
-            <a:noFill/>
+          <a:ln w="9525">
+            <a:solidFill>
+              <a:srgbClr val="1A284D"/>
+            </a:solidFill>
           </a:ln>
         </p:spPr>
         <p:style>
@@ -7273,14 +6749,14 @@
       </p:sp>
       <p:sp>
         <p:nvSpPr>
-          <p:cNvPr id="22" name="TextBox 21"/>
+          <p:cNvPr id="19" name="TextBox 18"/>
           <p:cNvSpPr txBox="1"/>
           <p:nvPr/>
         </p:nvSpPr>
         <p:spPr>
           <a:xfrm>
-            <a:off x="731520" y="3520440"/>
-            <a:ext cx="10789920" cy="457200"/>
+            <a:off x="8153247" y="4434840"/>
+            <a:ext cx="3054096" cy="594360"/>
           </a:xfrm>
           <a:prstGeom prst="rect">
             <a:avLst/>
@@ -7288,42 +6764,45 @@
           <a:noFill/>
         </p:spPr>
         <p:txBody>
-          <a:bodyPr wrap="none">
+          <a:bodyPr wrap="square">
             <a:spAutoFit/>
           </a:bodyPr>
           <a:lstStyle/>
           <a:p>
-            <a:r>
-              <a:rPr sz="1600">
+            <a:pPr algn="ctr"/>
+            <a:r>
+              <a:rPr sz="1600" b="0">
                 <a:solidFill>
                   <a:srgbClr val="EEF1F8"/>
                 </a:solidFill>
-                <a:latin typeface="Montserrat"/>
+                <a:latin typeface="Space Grotesk"/>
               </a:rPr>
-              <a:t>Платное продвижение партнёров</a:t>
-            </a:r>
-          </a:p>
-        </p:txBody>
-      </p:sp>
-      <p:sp>
-        <p:nvSpPr>
-          <p:cNvPr id="23" name="Rectangle 22"/>
+              <a:t>B2B-пакеты для корпоратов</a:t>
+            </a:r>
+          </a:p>
+        </p:txBody>
+      </p:sp>
+      <p:sp>
+        <p:nvSpPr>
+          <p:cNvPr id="20" name="Rectangle 19"/>
           <p:cNvSpPr/>
           <p:nvPr/>
         </p:nvSpPr>
         <p:spPr>
           <a:xfrm>
-            <a:off x="502920" y="4251960"/>
-            <a:ext cx="109728" cy="109728"/>
+            <a:off x="1935327" y="5349240"/>
+            <a:ext cx="2286000" cy="594360"/>
           </a:xfrm>
           <a:prstGeom prst="rect">
             <a:avLst/>
           </a:prstGeom>
           <a:solidFill>
-            <a:srgbClr val="5AA0FF"/>
+            <a:srgbClr val="0C1220"/>
           </a:solidFill>
-          <a:ln>
-            <a:noFill/>
+          <a:ln w="12700">
+            <a:solidFill>
+              <a:srgbClr val="1A284D"/>
+            </a:solidFill>
           </a:ln>
         </p:spPr>
         <p:style>
@@ -7350,14 +6829,14 @@
       </p:sp>
       <p:sp>
         <p:nvSpPr>
-          <p:cNvPr id="24" name="TextBox 23"/>
+          <p:cNvPr id="21" name="TextBox 20"/>
           <p:cNvSpPr txBox="1"/>
           <p:nvPr/>
         </p:nvSpPr>
         <p:spPr>
           <a:xfrm>
-            <a:off x="731520" y="4114800"/>
-            <a:ext cx="10789920" cy="457200"/>
+            <a:off x="1935327" y="5477256"/>
+            <a:ext cx="2286000" cy="365760"/>
           </a:xfrm>
           <a:prstGeom prst="rect">
             <a:avLst/>
@@ -7365,42 +6844,80 @@
           <a:noFill/>
         </p:spPr>
         <p:txBody>
-          <a:bodyPr wrap="none">
+          <a:bodyPr wrap="square">
             <a:spAutoFit/>
           </a:bodyPr>
           <a:lstStyle/>
           <a:p>
-            <a:r>
-              <a:rPr sz="1600">
+            <a:pPr algn="ctr"/>
+            <a:r>
+              <a:rPr sz="1600" b="1">
                 <a:solidFill>
                   <a:srgbClr val="EEF1F8"/>
+                </a:solidFill>
+                <a:latin typeface="Space Grotesk"/>
+              </a:rPr>
+              <a:t>Клиент</a:t>
+            </a:r>
+          </a:p>
+        </p:txBody>
+      </p:sp>
+      <p:sp>
+        <p:nvSpPr>
+          <p:cNvPr id="22" name="TextBox 21"/>
+          <p:cNvSpPr txBox="1"/>
+          <p:nvPr/>
+        </p:nvSpPr>
+        <p:spPr>
+          <a:xfrm>
+            <a:off x="4221327" y="5458968"/>
+            <a:ext cx="731520" cy="365760"/>
+          </a:xfrm>
+          <a:prstGeom prst="rect">
+            <a:avLst/>
+          </a:prstGeom>
+          <a:noFill/>
+        </p:spPr>
+        <p:txBody>
+          <a:bodyPr wrap="square">
+            <a:spAutoFit/>
+          </a:bodyPr>
+          <a:lstStyle/>
+          <a:p>
+            <a:pPr algn="ctr"/>
+            <a:r>
+              <a:rPr sz="2200" b="1">
+                <a:solidFill>
+                  <a:srgbClr val="5AA0FF"/>
                 </a:solidFill>
                 <a:latin typeface="Montserrat"/>
               </a:rPr>
-              <a:t>Премиум-размещение ресторанов, артистов и подрядчиков</a:t>
-            </a:r>
-          </a:p>
-        </p:txBody>
-      </p:sp>
-      <p:sp>
-        <p:nvSpPr>
-          <p:cNvPr id="25" name="Rectangle 24"/>
+              <a:t>→</a:t>
+            </a:r>
+          </a:p>
+        </p:txBody>
+      </p:sp>
+      <p:sp>
+        <p:nvSpPr>
+          <p:cNvPr id="23" name="Rectangle 22"/>
           <p:cNvSpPr/>
           <p:nvPr/>
         </p:nvSpPr>
         <p:spPr>
           <a:xfrm>
-            <a:off x="502920" y="4846320"/>
-            <a:ext cx="109728" cy="109728"/>
+            <a:off x="4952847" y="5349240"/>
+            <a:ext cx="2286000" cy="594360"/>
           </a:xfrm>
           <a:prstGeom prst="rect">
             <a:avLst/>
           </a:prstGeom>
           <a:solidFill>
-            <a:srgbClr val="5AA0FF"/>
+            <a:srgbClr val="2C7BFF"/>
           </a:solidFill>
-          <a:ln>
-            <a:noFill/>
+          <a:ln w="12700">
+            <a:solidFill>
+              <a:srgbClr val="2C7BFF"/>
+            </a:solidFill>
           </a:ln>
         </p:spPr>
         <p:style>
@@ -7427,14 +6944,14 @@
       </p:sp>
       <p:sp>
         <p:nvSpPr>
-          <p:cNvPr id="26" name="TextBox 25"/>
+          <p:cNvPr id="24" name="TextBox 23"/>
           <p:cNvSpPr txBox="1"/>
           <p:nvPr/>
         </p:nvSpPr>
         <p:spPr>
           <a:xfrm>
-            <a:off x="731520" y="4709160"/>
-            <a:ext cx="10789920" cy="457200"/>
+            <a:off x="4952847" y="5477256"/>
+            <a:ext cx="2286000" cy="365760"/>
           </a:xfrm>
           <a:prstGeom prst="rect">
             <a:avLst/>
@@ -7442,19 +6959,135 @@
           <a:noFill/>
         </p:spPr>
         <p:txBody>
-          <a:bodyPr wrap="none">
+          <a:bodyPr wrap="square">
             <a:spAutoFit/>
           </a:bodyPr>
           <a:lstStyle/>
           <a:p>
-            <a:r>
-              <a:rPr sz="1600">
+            <a:pPr algn="ctr"/>
+            <a:r>
+              <a:rPr sz="1600" b="1">
                 <a:solidFill>
                   <a:srgbClr val="EEF1F8"/>
+                </a:solidFill>
+                <a:latin typeface="Space Grotesk"/>
+              </a:rPr>
+              <a:t>Платформа</a:t>
+            </a:r>
+          </a:p>
+        </p:txBody>
+      </p:sp>
+      <p:sp>
+        <p:nvSpPr>
+          <p:cNvPr id="25" name="TextBox 24"/>
+          <p:cNvSpPr txBox="1"/>
+          <p:nvPr/>
+        </p:nvSpPr>
+        <p:spPr>
+          <a:xfrm>
+            <a:off x="7238847" y="5458968"/>
+            <a:ext cx="731520" cy="365760"/>
+          </a:xfrm>
+          <a:prstGeom prst="rect">
+            <a:avLst/>
+          </a:prstGeom>
+          <a:noFill/>
+        </p:spPr>
+        <p:txBody>
+          <a:bodyPr wrap="square">
+            <a:spAutoFit/>
+          </a:bodyPr>
+          <a:lstStyle/>
+          <a:p>
+            <a:pPr algn="ctr"/>
+            <a:r>
+              <a:rPr sz="2200" b="1">
+                <a:solidFill>
+                  <a:srgbClr val="5AA0FF"/>
                 </a:solidFill>
                 <a:latin typeface="Montserrat"/>
               </a:rPr>
-              <a:t>B2B-пакеты для event-компаний и площадок</a:t>
+              <a:t>→</a:t>
+            </a:r>
+          </a:p>
+        </p:txBody>
+      </p:sp>
+      <p:sp>
+        <p:nvSpPr>
+          <p:cNvPr id="26" name="Rectangle 25"/>
+          <p:cNvSpPr/>
+          <p:nvPr/>
+        </p:nvSpPr>
+        <p:spPr>
+          <a:xfrm>
+            <a:off x="7970367" y="5349240"/>
+            <a:ext cx="2286000" cy="594360"/>
+          </a:xfrm>
+          <a:prstGeom prst="rect">
+            <a:avLst/>
+          </a:prstGeom>
+          <a:solidFill>
+            <a:srgbClr val="0C1220"/>
+          </a:solidFill>
+          <a:ln w="12700">
+            <a:solidFill>
+              <a:srgbClr val="1A284D"/>
+            </a:solidFill>
+          </a:ln>
+        </p:spPr>
+        <p:style>
+          <a:lnRef idx="1">
+            <a:schemeClr val="accent1"/>
+          </a:lnRef>
+          <a:fillRef idx="3">
+            <a:schemeClr val="accent1"/>
+          </a:fillRef>
+          <a:effectRef idx="2">
+            <a:schemeClr val="accent1"/>
+          </a:effectRef>
+          <a:fontRef idx="minor">
+            <a:schemeClr val="lt1"/>
+          </a:fontRef>
+        </p:style>
+        <p:txBody>
+          <a:bodyPr rtlCol="0" anchor="ctr"/>
+          <a:lstStyle/>
+          <a:p>
+            <a:pPr algn="ctr"/>
+          </a:p>
+        </p:txBody>
+      </p:sp>
+      <p:sp>
+        <p:nvSpPr>
+          <p:cNvPr id="27" name="TextBox 26"/>
+          <p:cNvSpPr txBox="1"/>
+          <p:nvPr/>
+        </p:nvSpPr>
+        <p:spPr>
+          <a:xfrm>
+            <a:off x="7970367" y="5477256"/>
+            <a:ext cx="2286000" cy="365760"/>
+          </a:xfrm>
+          <a:prstGeom prst="rect">
+            <a:avLst/>
+          </a:prstGeom>
+          <a:noFill/>
+        </p:spPr>
+        <p:txBody>
+          <a:bodyPr wrap="square">
+            <a:spAutoFit/>
+          </a:bodyPr>
+          <a:lstStyle/>
+          <a:p>
+            <a:pPr algn="ctr"/>
+            <a:r>
+              <a:rPr sz="1600" b="1">
+                <a:solidFill>
+                  <a:srgbClr val="EEF1F8"/>
+                </a:solidFill>
+                <a:latin typeface="Space Grotesk"/>
+              </a:rPr>
+              <a:t>Партнёр</a:t>
             </a:r>
           </a:p>
         </p:txBody>
@@ -7477,95 +7110,9 @@
         <p:nvPr/>
       </p:nvGrpSpPr>
       <p:grpSpPr/>
-      <p:sp>
-        <p:nvSpPr>
-          <p:cNvPr id="2" name="Rectangle 1"/>
-          <p:cNvSpPr/>
-          <p:nvPr/>
-        </p:nvSpPr>
-        <p:spPr>
-          <a:xfrm>
-            <a:off x="0" y="0"/>
-            <a:ext cx="12191695" cy="6858000"/>
-          </a:xfrm>
-          <a:prstGeom prst="rect">
-            <a:avLst/>
-          </a:prstGeom>
-          <a:solidFill>
-            <a:srgbClr val="04060B"/>
-          </a:solidFill>
-          <a:ln>
-            <a:noFill/>
-          </a:ln>
-        </p:spPr>
-        <p:style>
-          <a:lnRef idx="1">
-            <a:schemeClr val="accent1"/>
-          </a:lnRef>
-          <a:fillRef idx="3">
-            <a:schemeClr val="accent1"/>
-          </a:fillRef>
-          <a:effectRef idx="2">
-            <a:schemeClr val="accent1"/>
-          </a:effectRef>
-          <a:fontRef idx="minor">
-            <a:schemeClr val="lt1"/>
-          </a:fontRef>
-        </p:style>
-        <p:txBody>
-          <a:bodyPr rtlCol="0" anchor="ctr"/>
-          <a:lstStyle/>
-          <a:p>
-            <a:pPr algn="ctr"/>
-          </a:p>
-        </p:txBody>
-      </p:sp>
-      <p:sp>
-        <p:nvSpPr>
-          <p:cNvPr id="3" name="Rectangle 2"/>
-          <p:cNvSpPr/>
-          <p:nvPr/>
-        </p:nvSpPr>
-        <p:spPr>
-          <a:xfrm>
-            <a:off x="6858000" y="0"/>
-            <a:ext cx="5333695" cy="3200400"/>
-          </a:xfrm>
-          <a:prstGeom prst="rect">
-            <a:avLst/>
-          </a:prstGeom>
-          <a:solidFill>
-            <a:srgbClr val="0A1124"/>
-          </a:solidFill>
-          <a:ln>
-            <a:noFill/>
-          </a:ln>
-        </p:spPr>
-        <p:style>
-          <a:lnRef idx="1">
-            <a:schemeClr val="accent1"/>
-          </a:lnRef>
-          <a:fillRef idx="3">
-            <a:schemeClr val="accent1"/>
-          </a:fillRef>
-          <a:effectRef idx="2">
-            <a:schemeClr val="accent1"/>
-          </a:effectRef>
-          <a:fontRef idx="minor">
-            <a:schemeClr val="lt1"/>
-          </a:fontRef>
-        </p:style>
-        <p:txBody>
-          <a:bodyPr rtlCol="0" anchor="ctr"/>
-          <a:lstStyle/>
-          <a:p>
-            <a:pPr algn="ctr"/>
-          </a:p>
-        </p:txBody>
-      </p:sp>
       <p:pic>
         <p:nvPicPr>
-          <p:cNvPr id="4" name="Picture 3" descr="logo-dark.png"/>
+          <p:cNvPr id="2" name="Picture 1" descr="bg-accent__1920x1080.png"/>
           <p:cNvPicPr>
             <a:picLocks noChangeAspect="1"/>
           </p:cNvPicPr>
@@ -7579,24 +7126,48 @@
         </p:blipFill>
         <p:spPr>
           <a:xfrm>
-            <a:off x="11098987" y="182880"/>
-            <a:ext cx="864108" cy="256031"/>
+            <a:off x="0" y="0"/>
+            <a:ext cx="12191695" cy="6858000"/>
           </a:xfrm>
           <a:prstGeom prst="rect">
             <a:avLst/>
           </a:prstGeom>
         </p:spPr>
       </p:pic>
-      <p:sp>
-        <p:nvSpPr>
-          <p:cNvPr id="5" name="TextBox 4"/>
+      <p:pic>
+        <p:nvPicPr>
+          <p:cNvPr id="3" name="Picture 2" descr="logo-dark.png"/>
+          <p:cNvPicPr>
+            <a:picLocks noChangeAspect="1"/>
+          </p:cNvPicPr>
+          <p:nvPr/>
+        </p:nvPicPr>
+        <p:blipFill>
+          <a:blip r:embed="rId3"/>
+          <a:stretch>
+            <a:fillRect/>
+          </a:stretch>
+        </p:blipFill>
+        <p:spPr>
+          <a:xfrm>
+            <a:off x="594360" y="201168"/>
+            <a:ext cx="1227242" cy="347472"/>
+          </a:xfrm>
+          <a:prstGeom prst="rect">
+            <a:avLst/>
+          </a:prstGeom>
+        </p:spPr>
+      </p:pic>
+      <p:sp>
+        <p:nvSpPr>
+          <p:cNvPr id="4" name="TextBox 3"/>
           <p:cNvSpPr txBox="1"/>
           <p:nvPr/>
         </p:nvSpPr>
         <p:spPr>
           <a:xfrm>
-            <a:off x="502920" y="228600"/>
-            <a:ext cx="5486400" cy="320040"/>
+            <a:off x="11185855" y="502920"/>
+            <a:ext cx="731520" cy="365760"/>
           </a:xfrm>
           <a:prstGeom prst="rect">
             <a:avLst/>
@@ -7609,29 +7180,29 @@
           </a:bodyPr>
           <a:lstStyle/>
           <a:p>
-            <a:pPr algn="l"/>
-            <a:r>
-              <a:rPr sz="1100" b="1" i="0">
-                <a:solidFill>
-                  <a:srgbClr val="2C7BFF"/>
-                </a:solidFill>
-                <a:latin typeface="Arial"/>
+            <a:pPr algn="r"/>
+            <a:r>
+              <a:rPr sz="1100" b="0">
+                <a:solidFill>
+                  <a:srgbClr val="9AA4B6"/>
+                </a:solidFill>
+                <a:latin typeface="JetBrains Mono"/>
               </a:rPr>
-              <a:t>ПОЧЕМУ ИНТЕРЕСНО ИНВЕСТОРУ</a:t>
-            </a:r>
-          </a:p>
-        </p:txBody>
-      </p:sp>
-      <p:sp>
-        <p:nvSpPr>
-          <p:cNvPr id="6" name="TextBox 5"/>
+              <a:t>05</a:t>
+            </a:r>
+          </a:p>
+        </p:txBody>
+      </p:sp>
+      <p:sp>
+        <p:nvSpPr>
+          <p:cNvPr id="5" name="TextBox 4"/>
           <p:cNvSpPr txBox="1"/>
           <p:nvPr/>
         </p:nvSpPr>
         <p:spPr>
           <a:xfrm>
-            <a:off x="502920" y="502920"/>
-            <a:ext cx="10515600" cy="1005840"/>
+            <a:off x="685800" y="502920"/>
+            <a:ext cx="10820095" cy="320040"/>
           </a:xfrm>
           <a:prstGeom prst="rect">
             <a:avLst/>
@@ -7646,14 +7217,48 @@
           <a:p>
             <a:pPr algn="l"/>
             <a:r>
-              <a:rPr sz="3400" b="1" i="0">
+              <a:rPr sz="1100" b="0">
+                <a:solidFill>
+                  <a:srgbClr val="5AA0FF"/>
+                </a:solidFill>
+                <a:latin typeface="JetBrains Mono"/>
+              </a:rPr>
+              <a:t>ПОЧЕМУ СЕЙЧАС</a:t>
+            </a:r>
+          </a:p>
+        </p:txBody>
+      </p:sp>
+      <p:sp>
+        <p:nvSpPr>
+          <p:cNvPr id="6" name="TextBox 5"/>
+          <p:cNvSpPr txBox="1"/>
+          <p:nvPr/>
+        </p:nvSpPr>
+        <p:spPr>
+          <a:xfrm>
+            <a:off x="685800" y="868680"/>
+            <a:ext cx="10820095" cy="685800"/>
+          </a:xfrm>
+          <a:prstGeom prst="rect">
+            <a:avLst/>
+          </a:prstGeom>
+          <a:noFill/>
+        </p:spPr>
+        <p:txBody>
+          <a:bodyPr wrap="square">
+            <a:spAutoFit/>
+          </a:bodyPr>
+          <a:lstStyle/>
+          <a:p>
+            <a:pPr algn="l"/>
+            <a:r>
+              <a:rPr sz="3400" b="1">
                 <a:solidFill>
                   <a:srgbClr val="EEF1F8"/>
                 </a:solidFill>
-                <a:latin typeface="Montserrat"/>
+                <a:latin typeface="Space Grotesk"/>
               </a:rPr>
-              <a:t>EVENT AI — масштабируемая платформа
-для event-рынка</a:t>
+              <a:t>Масштабируемая платформа event-рынка</a:t>
             </a:r>
           </a:p>
         </p:txBody>
@@ -7666,96 +7271,8 @@
         </p:nvSpPr>
         <p:spPr>
           <a:xfrm>
-            <a:off x="502920" y="1572768"/>
-            <a:ext cx="11155680" cy="18288"/>
-          </a:xfrm>
-          <a:prstGeom prst="rect">
-            <a:avLst/>
-          </a:prstGeom>
-          <a:solidFill>
-            <a:srgbClr val="222D40"/>
-          </a:solidFill>
-          <a:ln>
-            <a:noFill/>
-          </a:ln>
-        </p:spPr>
-        <p:style>
-          <a:lnRef idx="1">
-            <a:schemeClr val="accent1"/>
-          </a:lnRef>
-          <a:fillRef idx="3">
-            <a:schemeClr val="accent1"/>
-          </a:fillRef>
-          <a:effectRef idx="2">
-            <a:schemeClr val="accent1"/>
-          </a:effectRef>
-          <a:fontRef idx="minor">
-            <a:schemeClr val="lt1"/>
-          </a:fontRef>
-        </p:style>
-        <p:txBody>
-          <a:bodyPr rtlCol="0" anchor="ctr"/>
-          <a:lstStyle/>
-          <a:p>
-            <a:pPr algn="ctr"/>
-          </a:p>
-        </p:txBody>
-      </p:sp>
-      <p:sp>
-        <p:nvSpPr>
-          <p:cNvPr id="8" name="Rectangle 7"/>
-          <p:cNvSpPr/>
-          <p:nvPr/>
-        </p:nvSpPr>
-        <p:spPr>
-          <a:xfrm>
-            <a:off x="502920" y="1755648"/>
-            <a:ext cx="3520440" cy="868680"/>
-          </a:xfrm>
-          <a:prstGeom prst="rect">
-            <a:avLst/>
-          </a:prstGeom>
-          <a:solidFill>
-            <a:srgbClr val="0D1527"/>
-          </a:solidFill>
-          <a:ln w="6350">
-            <a:solidFill>
-              <a:srgbClr val="222D40"/>
-            </a:solidFill>
-          </a:ln>
-        </p:spPr>
-        <p:style>
-          <a:lnRef idx="1">
-            <a:schemeClr val="accent1"/>
-          </a:lnRef>
-          <a:fillRef idx="3">
-            <a:schemeClr val="accent1"/>
-          </a:fillRef>
-          <a:effectRef idx="2">
-            <a:schemeClr val="accent1"/>
-          </a:effectRef>
-          <a:fontRef idx="minor">
-            <a:schemeClr val="lt1"/>
-          </a:fontRef>
-        </p:style>
-        <p:txBody>
-          <a:bodyPr rtlCol="0" anchor="ctr"/>
-          <a:lstStyle/>
-          <a:p>
-            <a:pPr algn="ctr"/>
-          </a:p>
-        </p:txBody>
-      </p:sp>
-      <p:sp>
-        <p:nvSpPr>
-          <p:cNvPr id="9" name="Rectangle 8"/>
-          <p:cNvSpPr/>
-          <p:nvPr/>
-        </p:nvSpPr>
-        <p:spPr>
-          <a:xfrm>
-            <a:off x="502920" y="1755648"/>
-            <a:ext cx="50292" cy="868680"/>
+            <a:off x="685800" y="1828800"/>
+            <a:ext cx="640080" cy="12700"/>
           </a:xfrm>
           <a:prstGeom prst="rect">
             <a:avLst/>
@@ -7791,58 +7308,24 @@
       </p:sp>
       <p:sp>
         <p:nvSpPr>
-          <p:cNvPr id="10" name="TextBox 9"/>
-          <p:cNvSpPr txBox="1"/>
-          <p:nvPr/>
-        </p:nvSpPr>
-        <p:spPr>
-          <a:xfrm>
-            <a:off x="667512" y="1920240"/>
-            <a:ext cx="3264408" cy="640080"/>
-          </a:xfrm>
-          <a:prstGeom prst="rect">
-            <a:avLst/>
-          </a:prstGeom>
-          <a:noFill/>
-        </p:spPr>
-        <p:txBody>
-          <a:bodyPr wrap="square">
-            <a:spAutoFit/>
-          </a:bodyPr>
-          <a:lstStyle/>
-          <a:p>
-            <a:r>
-              <a:rPr sz="1400">
-                <a:solidFill>
-                  <a:srgbClr val="EEF1F8"/>
-                </a:solidFill>
-                <a:latin typeface="Montserrat"/>
-              </a:rPr>
-              <a:t>Большой рынок мероприятий</a:t>
-            </a:r>
-          </a:p>
-        </p:txBody>
-      </p:sp>
-      <p:sp>
-        <p:nvSpPr>
-          <p:cNvPr id="11" name="Rectangle 10"/>
+          <p:cNvPr id="8" name="Rectangle 7"/>
           <p:cNvSpPr/>
           <p:nvPr/>
         </p:nvSpPr>
         <p:spPr>
           <a:xfrm>
-            <a:off x="4297680" y="1755648"/>
-            <a:ext cx="3520440" cy="868680"/>
+            <a:off x="685800" y="2057400"/>
+            <a:ext cx="3383280" cy="1261872"/>
           </a:xfrm>
           <a:prstGeom prst="rect">
             <a:avLst/>
           </a:prstGeom>
           <a:solidFill>
-            <a:srgbClr val="0D1527"/>
+            <a:srgbClr val="0A0F1C"/>
           </a:solidFill>
-          <a:ln w="6350">
+          <a:ln w="9525">
             <a:solidFill>
-              <a:srgbClr val="222D40"/>
+              <a:srgbClr val="1A284D"/>
             </a:solidFill>
           </a:ln>
         </p:spPr>
@@ -7870,14 +7353,14 @@
       </p:sp>
       <p:sp>
         <p:nvSpPr>
-          <p:cNvPr id="12" name="Rectangle 11"/>
+          <p:cNvPr id="9" name="Rectangle 8"/>
           <p:cNvSpPr/>
           <p:nvPr/>
         </p:nvSpPr>
         <p:spPr>
           <a:xfrm>
-            <a:off x="4297680" y="1755648"/>
-            <a:ext cx="50292" cy="868680"/>
+            <a:off x="886968" y="2258568"/>
+            <a:ext cx="73152" cy="73152"/>
           </a:xfrm>
           <a:prstGeom prst="rect">
             <a:avLst/>
@@ -7913,14 +7396,14 @@
       </p:sp>
       <p:sp>
         <p:nvSpPr>
-          <p:cNvPr id="13" name="TextBox 12"/>
+          <p:cNvPr id="10" name="TextBox 9"/>
           <p:cNvSpPr txBox="1"/>
           <p:nvPr/>
         </p:nvSpPr>
         <p:spPr>
           <a:xfrm>
-            <a:off x="4462272" y="1920240"/>
-            <a:ext cx="3264408" cy="640080"/>
+            <a:off x="886968" y="2441448"/>
+            <a:ext cx="2980944" cy="758952"/>
           </a:xfrm>
           <a:prstGeom prst="rect">
             <a:avLst/>
@@ -7933,38 +7416,39 @@
           </a:bodyPr>
           <a:lstStyle/>
           <a:p>
-            <a:r>
-              <a:rPr sz="1400">
+            <a:pPr algn="l"/>
+            <a:r>
+              <a:rPr sz="1600" b="1">
                 <a:solidFill>
                   <a:srgbClr val="EEF1F8"/>
                 </a:solidFill>
-                <a:latin typeface="Montserrat"/>
+                <a:latin typeface="Space Grotesk"/>
               </a:rPr>
-              <a:t>Простая модель бронирования</a:t>
-            </a:r>
-          </a:p>
-        </p:txBody>
-      </p:sp>
-      <p:sp>
-        <p:nvSpPr>
-          <p:cNvPr id="14" name="Rectangle 13"/>
+              <a:t>Большой и растущий рынок</a:t>
+            </a:r>
+          </a:p>
+        </p:txBody>
+      </p:sp>
+      <p:sp>
+        <p:nvSpPr>
+          <p:cNvPr id="11" name="Rectangle 10"/>
           <p:cNvSpPr/>
           <p:nvPr/>
         </p:nvSpPr>
         <p:spPr>
           <a:xfrm>
-            <a:off x="8092440" y="1755648"/>
-            <a:ext cx="3520440" cy="868680"/>
+            <a:off x="4251960" y="2057400"/>
+            <a:ext cx="3383280" cy="1261872"/>
           </a:xfrm>
           <a:prstGeom prst="rect">
             <a:avLst/>
           </a:prstGeom>
           <a:solidFill>
-            <a:srgbClr val="0D1527"/>
+            <a:srgbClr val="0A0F1C"/>
           </a:solidFill>
-          <a:ln w="6350">
+          <a:ln w="9525">
             <a:solidFill>
-              <a:srgbClr val="222D40"/>
+              <a:srgbClr val="1A284D"/>
             </a:solidFill>
           </a:ln>
         </p:spPr>
@@ -7992,14 +7476,14 @@
       </p:sp>
       <p:sp>
         <p:nvSpPr>
-          <p:cNvPr id="15" name="Rectangle 14"/>
+          <p:cNvPr id="12" name="Rectangle 11"/>
           <p:cNvSpPr/>
           <p:nvPr/>
         </p:nvSpPr>
         <p:spPr>
           <a:xfrm>
-            <a:off x="8092440" y="1755648"/>
-            <a:ext cx="50292" cy="868680"/>
+            <a:off x="4453128" y="2258568"/>
+            <a:ext cx="73152" cy="73152"/>
           </a:xfrm>
           <a:prstGeom prst="rect">
             <a:avLst/>
@@ -8035,14 +7519,14 @@
       </p:sp>
       <p:sp>
         <p:nvSpPr>
-          <p:cNvPr id="16" name="TextBox 15"/>
+          <p:cNvPr id="13" name="TextBox 12"/>
           <p:cNvSpPr txBox="1"/>
           <p:nvPr/>
         </p:nvSpPr>
         <p:spPr>
           <a:xfrm>
-            <a:off x="8257032" y="1920240"/>
-            <a:ext cx="3264408" cy="640080"/>
+            <a:off x="4453128" y="2441448"/>
+            <a:ext cx="2980944" cy="758952"/>
           </a:xfrm>
           <a:prstGeom prst="rect">
             <a:avLst/>
@@ -8055,38 +7539,39 @@
           </a:bodyPr>
           <a:lstStyle/>
           <a:p>
-            <a:r>
-              <a:rPr sz="1400">
+            <a:pPr algn="l"/>
+            <a:r>
+              <a:rPr sz="1600" b="1">
                 <a:solidFill>
                   <a:srgbClr val="EEF1F8"/>
                 </a:solidFill>
-                <a:latin typeface="Montserrat"/>
+                <a:latin typeface="Space Grotesk"/>
               </a:rPr>
-              <a:t>AI снижает ручную работу</a:t>
-            </a:r>
-          </a:p>
-        </p:txBody>
-      </p:sp>
-      <p:sp>
-        <p:nvSpPr>
-          <p:cNvPr id="17" name="Rectangle 16"/>
+              <a:t>Простая модель бронирования</a:t>
+            </a:r>
+          </a:p>
+        </p:txBody>
+      </p:sp>
+      <p:sp>
+        <p:nvSpPr>
+          <p:cNvPr id="14" name="Rectangle 13"/>
           <p:cNvSpPr/>
           <p:nvPr/>
         </p:nvSpPr>
         <p:spPr>
           <a:xfrm>
-            <a:off x="502920" y="2788920"/>
-            <a:ext cx="3520440" cy="868680"/>
+            <a:off x="7818120" y="2057400"/>
+            <a:ext cx="3383280" cy="1261872"/>
           </a:xfrm>
           <a:prstGeom prst="rect">
             <a:avLst/>
           </a:prstGeom>
           <a:solidFill>
-            <a:srgbClr val="0D1527"/>
+            <a:srgbClr val="0A0F1C"/>
           </a:solidFill>
-          <a:ln w="6350">
+          <a:ln w="9525">
             <a:solidFill>
-              <a:srgbClr val="222D40"/>
+              <a:srgbClr val="1A284D"/>
             </a:solidFill>
           </a:ln>
         </p:spPr>
@@ -8114,14 +7599,14 @@
       </p:sp>
       <p:sp>
         <p:nvSpPr>
-          <p:cNvPr id="18" name="Rectangle 17"/>
+          <p:cNvPr id="15" name="Rectangle 14"/>
           <p:cNvSpPr/>
           <p:nvPr/>
         </p:nvSpPr>
         <p:spPr>
           <a:xfrm>
-            <a:off x="502920" y="2788920"/>
-            <a:ext cx="50292" cy="868680"/>
+            <a:off x="8019288" y="2258568"/>
+            <a:ext cx="73152" cy="73152"/>
           </a:xfrm>
           <a:prstGeom prst="rect">
             <a:avLst/>
@@ -8157,14 +7642,14 @@
       </p:sp>
       <p:sp>
         <p:nvSpPr>
-          <p:cNvPr id="19" name="TextBox 18"/>
+          <p:cNvPr id="16" name="TextBox 15"/>
           <p:cNvSpPr txBox="1"/>
           <p:nvPr/>
         </p:nvSpPr>
         <p:spPr>
           <a:xfrm>
-            <a:off x="667512" y="2953512"/>
-            <a:ext cx="3264408" cy="640080"/>
+            <a:off x="8019288" y="2441448"/>
+            <a:ext cx="2980944" cy="758952"/>
           </a:xfrm>
           <a:prstGeom prst="rect">
             <a:avLst/>
@@ -8177,38 +7662,39 @@
           </a:bodyPr>
           <a:lstStyle/>
           <a:p>
-            <a:r>
-              <a:rPr sz="1400">
+            <a:pPr algn="l"/>
+            <a:r>
+              <a:rPr sz="1600" b="1">
                 <a:solidFill>
                   <a:srgbClr val="EEF1F8"/>
                 </a:solidFill>
-                <a:latin typeface="Montserrat"/>
+                <a:latin typeface="Space Grotesk"/>
               </a:rPr>
-              <a:t>Объединяет клиентов и подрядчиков</a:t>
-            </a:r>
-          </a:p>
-        </p:txBody>
-      </p:sp>
-      <p:sp>
-        <p:nvSpPr>
-          <p:cNvPr id="20" name="Rectangle 19"/>
+              <a:t>AI снижает ручную работу</a:t>
+            </a:r>
+          </a:p>
+        </p:txBody>
+      </p:sp>
+      <p:sp>
+        <p:nvSpPr>
+          <p:cNvPr id="17" name="Rectangle 16"/>
           <p:cNvSpPr/>
           <p:nvPr/>
         </p:nvSpPr>
         <p:spPr>
           <a:xfrm>
-            <a:off x="4297680" y="2788920"/>
-            <a:ext cx="3520440" cy="868680"/>
+            <a:off x="685800" y="3502152"/>
+            <a:ext cx="3383280" cy="1261872"/>
           </a:xfrm>
           <a:prstGeom prst="rect">
             <a:avLst/>
           </a:prstGeom>
           <a:solidFill>
-            <a:srgbClr val="0D1527"/>
+            <a:srgbClr val="0A0F1C"/>
           </a:solidFill>
-          <a:ln w="6350">
+          <a:ln w="9525">
             <a:solidFill>
-              <a:srgbClr val="222D40"/>
+              <a:srgbClr val="1A284D"/>
             </a:solidFill>
           </a:ln>
         </p:spPr>
@@ -8236,14 +7722,14 @@
       </p:sp>
       <p:sp>
         <p:nvSpPr>
-          <p:cNvPr id="21" name="Rectangle 20"/>
+          <p:cNvPr id="18" name="Rectangle 17"/>
           <p:cNvSpPr/>
           <p:nvPr/>
         </p:nvSpPr>
         <p:spPr>
           <a:xfrm>
-            <a:off x="4297680" y="2788920"/>
-            <a:ext cx="50292" cy="868680"/>
+            <a:off x="886968" y="3703320"/>
+            <a:ext cx="73152" cy="73152"/>
           </a:xfrm>
           <a:prstGeom prst="rect">
             <a:avLst/>
@@ -8279,14 +7765,14 @@
       </p:sp>
       <p:sp>
         <p:nvSpPr>
-          <p:cNvPr id="22" name="TextBox 21"/>
+          <p:cNvPr id="19" name="TextBox 18"/>
           <p:cNvSpPr txBox="1"/>
           <p:nvPr/>
         </p:nvSpPr>
         <p:spPr>
           <a:xfrm>
-            <a:off x="4462272" y="2953512"/>
-            <a:ext cx="3264408" cy="640080"/>
+            <a:off x="886968" y="3886200"/>
+            <a:ext cx="2980944" cy="758952"/>
           </a:xfrm>
           <a:prstGeom prst="rect">
             <a:avLst/>
@@ -8299,38 +7785,39 @@
           </a:bodyPr>
           <a:lstStyle/>
           <a:p>
-            <a:r>
-              <a:rPr sz="1400">
+            <a:pPr algn="l"/>
+            <a:r>
+              <a:rPr sz="1600" b="1">
                 <a:solidFill>
                   <a:srgbClr val="EEF1F8"/>
                 </a:solidFill>
-                <a:latin typeface="Montserrat"/>
+                <a:latin typeface="Space Grotesk"/>
               </a:rPr>
-              <a:t>Масштабирование по городам и странам</a:t>
-            </a:r>
-          </a:p>
-        </p:txBody>
-      </p:sp>
-      <p:sp>
-        <p:nvSpPr>
-          <p:cNvPr id="23" name="Rectangle 22"/>
+              <a:t>Объединяет клиентов и подрядчиков</a:t>
+            </a:r>
+          </a:p>
+        </p:txBody>
+      </p:sp>
+      <p:sp>
+        <p:nvSpPr>
+          <p:cNvPr id="20" name="Rectangle 19"/>
           <p:cNvSpPr/>
           <p:nvPr/>
         </p:nvSpPr>
         <p:spPr>
           <a:xfrm>
-            <a:off x="8092440" y="2788920"/>
-            <a:ext cx="3520440" cy="868680"/>
+            <a:off x="4251960" y="3502152"/>
+            <a:ext cx="3383280" cy="1261872"/>
           </a:xfrm>
           <a:prstGeom prst="rect">
             <a:avLst/>
           </a:prstGeom>
           <a:solidFill>
-            <a:srgbClr val="0D1527"/>
+            <a:srgbClr val="0A0F1C"/>
           </a:solidFill>
-          <a:ln w="6350">
+          <a:ln w="9525">
             <a:solidFill>
-              <a:srgbClr val="222D40"/>
+              <a:srgbClr val="1A284D"/>
             </a:solidFill>
           </a:ln>
         </p:spPr>
@@ -8358,14 +7845,14 @@
       </p:sp>
       <p:sp>
         <p:nvSpPr>
-          <p:cNvPr id="24" name="Rectangle 23"/>
+          <p:cNvPr id="21" name="Rectangle 20"/>
           <p:cNvSpPr/>
           <p:nvPr/>
         </p:nvSpPr>
         <p:spPr>
           <a:xfrm>
-            <a:off x="8092440" y="2788920"/>
-            <a:ext cx="50292" cy="868680"/>
+            <a:off x="4453128" y="3703320"/>
+            <a:ext cx="73152" cy="73152"/>
           </a:xfrm>
           <a:prstGeom prst="rect">
             <a:avLst/>
@@ -8401,14 +7888,14 @@
       </p:sp>
       <p:sp>
         <p:nvSpPr>
-          <p:cNvPr id="25" name="TextBox 24"/>
+          <p:cNvPr id="22" name="TextBox 21"/>
           <p:cNvSpPr txBox="1"/>
           <p:nvPr/>
         </p:nvSpPr>
         <p:spPr>
           <a:xfrm>
-            <a:off x="8257032" y="2953512"/>
-            <a:ext cx="3264408" cy="640080"/>
+            <a:off x="4453128" y="3886200"/>
+            <a:ext cx="2980944" cy="758952"/>
           </a:xfrm>
           <a:prstGeom prst="rect">
             <a:avLst/>
@@ -8421,28 +7908,74 @@
           </a:bodyPr>
           <a:lstStyle/>
           <a:p>
-            <a:r>
-              <a:rPr sz="1400">
+            <a:pPr algn="l"/>
+            <a:r>
+              <a:rPr sz="1600" b="1">
                 <a:solidFill>
                   <a:srgbClr val="EEF1F8"/>
                 </a:solidFill>
-                <a:latin typeface="Montserrat"/>
+                <a:latin typeface="Space Grotesk"/>
               </a:rPr>
-              <a:t>Готовится мобильное приложение для App Store и Play Market</a:t>
-            </a:r>
-          </a:p>
-        </p:txBody>
-      </p:sp>
-      <p:sp>
-        <p:nvSpPr>
-          <p:cNvPr id="26" name="Rectangle 25"/>
+              <a:t>Масштаб по городам и странам</a:t>
+            </a:r>
+          </a:p>
+        </p:txBody>
+      </p:sp>
+      <p:sp>
+        <p:nvSpPr>
+          <p:cNvPr id="23" name="Rectangle 22"/>
           <p:cNvSpPr/>
           <p:nvPr/>
         </p:nvSpPr>
         <p:spPr>
           <a:xfrm>
-            <a:off x="502920" y="3858768"/>
-            <a:ext cx="11155680" cy="914400"/>
+            <a:off x="7818120" y="3502152"/>
+            <a:ext cx="3383280" cy="1261872"/>
+          </a:xfrm>
+          <a:prstGeom prst="rect">
+            <a:avLst/>
+          </a:prstGeom>
+          <a:solidFill>
+            <a:srgbClr val="0A0F1C"/>
+          </a:solidFill>
+          <a:ln w="9525">
+            <a:solidFill>
+              <a:srgbClr val="1A284D"/>
+            </a:solidFill>
+          </a:ln>
+        </p:spPr>
+        <p:style>
+          <a:lnRef idx="1">
+            <a:schemeClr val="accent1"/>
+          </a:lnRef>
+          <a:fillRef idx="3">
+            <a:schemeClr val="accent1"/>
+          </a:fillRef>
+          <a:effectRef idx="2">
+            <a:schemeClr val="accent1"/>
+          </a:effectRef>
+          <a:fontRef idx="minor">
+            <a:schemeClr val="lt1"/>
+          </a:fontRef>
+        </p:style>
+        <p:txBody>
+          <a:bodyPr rtlCol="0" anchor="ctr"/>
+          <a:lstStyle/>
+          <a:p>
+            <a:pPr algn="ctr"/>
+          </a:p>
+        </p:txBody>
+      </p:sp>
+      <p:sp>
+        <p:nvSpPr>
+          <p:cNvPr id="24" name="Rectangle 23"/>
+          <p:cNvSpPr/>
+          <p:nvPr/>
+        </p:nvSpPr>
+        <p:spPr>
+          <a:xfrm>
+            <a:off x="8019288" y="3703320"/>
+            <a:ext cx="73152" cy="73152"/>
           </a:xfrm>
           <a:prstGeom prst="rect">
             <a:avLst/>
@@ -8478,14 +8011,14 @@
       </p:sp>
       <p:sp>
         <p:nvSpPr>
-          <p:cNvPr id="27" name="TextBox 26"/>
+          <p:cNvPr id="25" name="TextBox 24"/>
           <p:cNvSpPr txBox="1"/>
           <p:nvPr/>
         </p:nvSpPr>
         <p:spPr>
           <a:xfrm>
-            <a:off x="685800" y="3995928"/>
-            <a:ext cx="9144000" cy="640080"/>
+            <a:off x="8019288" y="3886200"/>
+            <a:ext cx="2980944" cy="758952"/>
           </a:xfrm>
           <a:prstGeom prst="rect">
             <a:avLst/>
@@ -8498,15 +8031,93 @@
           </a:bodyPr>
           <a:lstStyle/>
           <a:p>
+            <a:pPr algn="l"/>
+            <a:r>
+              <a:rPr sz="1600" b="1">
+                <a:solidFill>
+                  <a:srgbClr val="EEF1F8"/>
+                </a:solidFill>
+                <a:latin typeface="Space Grotesk"/>
+              </a:rPr>
+              <a:t>Моб. приложение — App Store / Play</a:t>
+            </a:r>
+          </a:p>
+        </p:txBody>
+      </p:sp>
+      <p:sp>
+        <p:nvSpPr>
+          <p:cNvPr id="26" name="Rectangle 25"/>
+          <p:cNvSpPr/>
+          <p:nvPr/>
+        </p:nvSpPr>
+        <p:spPr>
+          <a:xfrm>
+            <a:off x="685800" y="5074920"/>
+            <a:ext cx="10820095" cy="594360"/>
+          </a:xfrm>
+          <a:prstGeom prst="rect">
+            <a:avLst/>
+          </a:prstGeom>
+          <a:solidFill>
+            <a:srgbClr val="2C7BFF"/>
+          </a:solidFill>
+          <a:ln>
+            <a:noFill/>
+          </a:ln>
+        </p:spPr>
+        <p:style>
+          <a:lnRef idx="1">
+            <a:schemeClr val="accent1"/>
+          </a:lnRef>
+          <a:fillRef idx="3">
+            <a:schemeClr val="accent1"/>
+          </a:fillRef>
+          <a:effectRef idx="2">
+            <a:schemeClr val="accent1"/>
+          </a:effectRef>
+          <a:fontRef idx="minor">
+            <a:schemeClr val="lt1"/>
+          </a:fontRef>
+        </p:style>
+        <p:txBody>
+          <a:bodyPr rtlCol="0" anchor="ctr"/>
+          <a:lstStyle/>
+          <a:p>
             <a:pPr algn="ctr"/>
-            <a:r>
-              <a:rPr sz="1800" b="1">
-                <a:solidFill>
-                  <a:srgbClr val="FFFFFF"/>
-                </a:solidFill>
-                <a:latin typeface="Montserrat"/>
+          </a:p>
+        </p:txBody>
+      </p:sp>
+      <p:sp>
+        <p:nvSpPr>
+          <p:cNvPr id="27" name="TextBox 26"/>
+          <p:cNvSpPr txBox="1"/>
+          <p:nvPr/>
+        </p:nvSpPr>
+        <p:spPr>
+          <a:xfrm>
+            <a:off x="960120" y="5166360"/>
+            <a:ext cx="10271455" cy="457200"/>
+          </a:xfrm>
+          <a:prstGeom prst="rect">
+            <a:avLst/>
+          </a:prstGeom>
+          <a:noFill/>
+        </p:spPr>
+        <p:txBody>
+          <a:bodyPr wrap="square">
+            <a:spAutoFit/>
+          </a:bodyPr>
+          <a:lstStyle/>
+          <a:p>
+            <a:pPr algn="ctr"/>
+            <a:r>
+              <a:rPr sz="1700" b="1">
+                <a:solidFill>
+                  <a:srgbClr val="EEF1F8"/>
+                </a:solidFill>
+                <a:latin typeface="Space Grotesk"/>
               </a:rPr>
-              <a:t>EVENT AI превращает сложную организацию мероприятия в простой цифровой сервис</a:t>
+              <a:t>Сложная организация мероприятия → простой цифровой сервис</a:t>
             </a:r>
           </a:p>
         </p:txBody>
@@ -8519,14 +8130,14 @@
         </p:nvSpPr>
         <p:spPr>
           <a:xfrm>
-            <a:off x="502920" y="4983480"/>
-            <a:ext cx="3108960" cy="548640"/>
+            <a:off x="685800" y="5870448"/>
+            <a:ext cx="2926080" cy="502920"/>
           </a:xfrm>
           <a:prstGeom prst="rect">
             <a:avLst/>
           </a:prstGeom>
           <a:solidFill>
-            <a:srgbClr val="2C7BFF"/>
+            <a:srgbClr val="060C18"/>
           </a:solidFill>
           <a:ln w="12700">
             <a:solidFill>
@@ -8564,43 +8175,8 @@
         </p:nvSpPr>
         <p:spPr>
           <a:xfrm>
-            <a:off x="502920" y="4983480"/>
-            <a:ext cx="3108960" cy="548640"/>
-          </a:xfrm>
-          <a:prstGeom prst="rect">
-            <a:avLst/>
-          </a:prstGeom>
-          <a:noFill/>
-        </p:spPr>
-        <p:txBody>
-          <a:bodyPr wrap="none">
-            <a:spAutoFit/>
-          </a:bodyPr>
-          <a:lstStyle/>
-          <a:p>
-            <a:pPr algn="ctr"/>
-            <a:r>
-              <a:rPr sz="1300" b="1">
-                <a:solidFill>
-                  <a:srgbClr val="FFFFFF"/>
-                </a:solidFill>
-                <a:latin typeface="Arial"/>
-              </a:rPr>
-              <a:t>INVESTMENT OPPORTUNITY</a:t>
-            </a:r>
-          </a:p>
-        </p:txBody>
-      </p:sp>
-      <p:sp>
-        <p:nvSpPr>
-          <p:cNvPr id="30" name="TextBox 29"/>
-          <p:cNvSpPr txBox="1"/>
-          <p:nvPr/>
-        </p:nvSpPr>
-        <p:spPr>
-          <a:xfrm>
-            <a:off x="3886200" y="5074920"/>
-            <a:ext cx="3657600" cy="411480"/>
+            <a:off x="822960" y="5961888"/>
+            <a:ext cx="2651760" cy="365760"/>
           </a:xfrm>
           <a:prstGeom prst="rect">
             <a:avLst/>
@@ -8615,27 +8191,27 @@
           <a:p>
             <a:pPr algn="l"/>
             <a:r>
-              <a:rPr sz="1700" b="1" i="0">
-                <a:solidFill>
-                  <a:srgbClr val="2C7BFF"/>
-                </a:solidFill>
-                <a:latin typeface="Arial"/>
+              <a:rPr sz="1200" b="1">
+                <a:solidFill>
+                  <a:srgbClr val="5AA0FF"/>
+                </a:solidFill>
+                <a:latin typeface="JetBrains Mono"/>
               </a:rPr>
-              <a:t>+7 747 253 11 38</a:t>
-            </a:r>
-          </a:p>
-        </p:txBody>
-      </p:sp>
-      <p:sp>
-        <p:nvSpPr>
-          <p:cNvPr id="31" name="TextBox 30"/>
+              <a:t>⬡  INVESTMENT OPPORTUNITY</a:t>
+            </a:r>
+          </a:p>
+        </p:txBody>
+      </p:sp>
+      <p:sp>
+        <p:nvSpPr>
+          <p:cNvPr id="30" name="TextBox 29"/>
           <p:cNvSpPr txBox="1"/>
           <p:nvPr/>
         </p:nvSpPr>
         <p:spPr>
           <a:xfrm>
-            <a:off x="7772400" y="5074920"/>
-            <a:ext cx="4114800" cy="411480"/>
+            <a:off x="8716975" y="5943600"/>
+            <a:ext cx="2743200" cy="502920"/>
           </a:xfrm>
           <a:prstGeom prst="rect">
             <a:avLst/>
@@ -8648,15 +8224,15 @@
           </a:bodyPr>
           <a:lstStyle/>
           <a:p>
-            <a:pPr algn="l"/>
-            <a:r>
-              <a:rPr sz="1300" b="0" i="0">
-                <a:solidFill>
-                  <a:srgbClr val="9AA4B6"/>
-                </a:solidFill>
-                <a:latin typeface="Montserrat"/>
+            <a:pPr algn="r"/>
+            <a:r>
+              <a:rPr sz="1500" b="1">
+                <a:solidFill>
+                  <a:srgbClr val="EEF1F8"/>
+                </a:solidFill>
+                <a:latin typeface="JetBrains Mono"/>
               </a:rPr>
-              <a:t>eventai.kz  ·  Алматы, Казахстан</a:t>
+              <a:t>+7 747 253 11 38</a:t>
             </a:r>
           </a:p>
         </p:txBody>
